--- a/Einführung in Git und Github.pptx
+++ b/Einführung in Git und Github.pptx
@@ -2,7 +2,7 @@
 <file path=ppt/presentation.xml><?xml version="1.0" encoding="utf-8"?>
 <p:presentation xmlns:a="http://schemas.openxmlformats.org/drawingml/2006/main" xmlns:r="http://schemas.openxmlformats.org/officeDocument/2006/relationships" xmlns:p="http://schemas.openxmlformats.org/presentationml/2006/main" saveSubsetFonts="1">
   <p:sldMasterIdLst>
-    <p:sldMasterId id="2147483648" r:id="rId1"/>
+    <p:sldMasterId id="2147483701" r:id="rId1"/>
   </p:sldMasterIdLst>
   <p:notesMasterIdLst>
     <p:notesMasterId r:id="rId20"/>
@@ -33,7 +33,7 @@
     <a:defPPr>
       <a:defRPr lang="en-US"/>
     </a:defPPr>
-    <a:lvl1pPr marL="0" algn="l" defTabSz="914400" rtl="0" eaLnBrk="1" latinLnBrk="0" hangingPunct="1">
+    <a:lvl1pPr marL="0" algn="l" defTabSz="457200" rtl="0" eaLnBrk="1" latinLnBrk="0" hangingPunct="1">
       <a:defRPr sz="1800" kern="1200">
         <a:solidFill>
           <a:schemeClr val="tx1"/>
@@ -43,7 +43,7 @@
         <a:cs typeface="+mn-cs"/>
       </a:defRPr>
     </a:lvl1pPr>
-    <a:lvl2pPr marL="457200" algn="l" defTabSz="914400" rtl="0" eaLnBrk="1" latinLnBrk="0" hangingPunct="1">
+    <a:lvl2pPr marL="457200" algn="l" defTabSz="457200" rtl="0" eaLnBrk="1" latinLnBrk="0" hangingPunct="1">
       <a:defRPr sz="1800" kern="1200">
         <a:solidFill>
           <a:schemeClr val="tx1"/>
@@ -53,7 +53,7 @@
         <a:cs typeface="+mn-cs"/>
       </a:defRPr>
     </a:lvl2pPr>
-    <a:lvl3pPr marL="914400" algn="l" defTabSz="914400" rtl="0" eaLnBrk="1" latinLnBrk="0" hangingPunct="1">
+    <a:lvl3pPr marL="914400" algn="l" defTabSz="457200" rtl="0" eaLnBrk="1" latinLnBrk="0" hangingPunct="1">
       <a:defRPr sz="1800" kern="1200">
         <a:solidFill>
           <a:schemeClr val="tx1"/>
@@ -63,7 +63,7 @@
         <a:cs typeface="+mn-cs"/>
       </a:defRPr>
     </a:lvl3pPr>
-    <a:lvl4pPr marL="1371600" algn="l" defTabSz="914400" rtl="0" eaLnBrk="1" latinLnBrk="0" hangingPunct="1">
+    <a:lvl4pPr marL="1371600" algn="l" defTabSz="457200" rtl="0" eaLnBrk="1" latinLnBrk="0" hangingPunct="1">
       <a:defRPr sz="1800" kern="1200">
         <a:solidFill>
           <a:schemeClr val="tx1"/>
@@ -73,7 +73,7 @@
         <a:cs typeface="+mn-cs"/>
       </a:defRPr>
     </a:lvl4pPr>
-    <a:lvl5pPr marL="1828800" algn="l" defTabSz="914400" rtl="0" eaLnBrk="1" latinLnBrk="0" hangingPunct="1">
+    <a:lvl5pPr marL="1828800" algn="l" defTabSz="457200" rtl="0" eaLnBrk="1" latinLnBrk="0" hangingPunct="1">
       <a:defRPr sz="1800" kern="1200">
         <a:solidFill>
           <a:schemeClr val="tx1"/>
@@ -83,7 +83,7 @@
         <a:cs typeface="+mn-cs"/>
       </a:defRPr>
     </a:lvl5pPr>
-    <a:lvl6pPr marL="2286000" algn="l" defTabSz="914400" rtl="0" eaLnBrk="1" latinLnBrk="0" hangingPunct="1">
+    <a:lvl6pPr marL="2286000" algn="l" defTabSz="457200" rtl="0" eaLnBrk="1" latinLnBrk="0" hangingPunct="1">
       <a:defRPr sz="1800" kern="1200">
         <a:solidFill>
           <a:schemeClr val="tx1"/>
@@ -93,7 +93,7 @@
         <a:cs typeface="+mn-cs"/>
       </a:defRPr>
     </a:lvl6pPr>
-    <a:lvl7pPr marL="2743200" algn="l" defTabSz="914400" rtl="0" eaLnBrk="1" latinLnBrk="0" hangingPunct="1">
+    <a:lvl7pPr marL="2743200" algn="l" defTabSz="457200" rtl="0" eaLnBrk="1" latinLnBrk="0" hangingPunct="1">
       <a:defRPr sz="1800" kern="1200">
         <a:solidFill>
           <a:schemeClr val="tx1"/>
@@ -103,7 +103,7 @@
         <a:cs typeface="+mn-cs"/>
       </a:defRPr>
     </a:lvl7pPr>
-    <a:lvl8pPr marL="3200400" algn="l" defTabSz="914400" rtl="0" eaLnBrk="1" latinLnBrk="0" hangingPunct="1">
+    <a:lvl8pPr marL="3200400" algn="l" defTabSz="457200" rtl="0" eaLnBrk="1" latinLnBrk="0" hangingPunct="1">
       <a:defRPr sz="1800" kern="1200">
         <a:solidFill>
           <a:schemeClr val="tx1"/>
@@ -113,7 +113,7 @@
         <a:cs typeface="+mn-cs"/>
       </a:defRPr>
     </a:lvl8pPr>
-    <a:lvl9pPr marL="3657600" algn="l" defTabSz="914400" rtl="0" eaLnBrk="1" latinLnBrk="0" hangingPunct="1">
+    <a:lvl9pPr marL="3657600" algn="l" defTabSz="457200" rtl="0" eaLnBrk="1" latinLnBrk="0" hangingPunct="1">
       <a:defRPr sz="1800" kern="1200">
         <a:solidFill>
           <a:schemeClr val="tx1"/>
@@ -214,7 +214,7 @@
           <a:p>
             <a:fld id="{495DC990-979D-4B1C-8AB2-0432C149ACE9}" type="datetimeFigureOut">
               <a:rPr lang="en-US" smtClean="0"/>
-              <a:t>8/31/2026</a:t>
+              <a:t>9/14/2026</a:t>
             </a:fld>
             <a:endParaRPr lang="en-US"/>
           </a:p>
@@ -1871,7 +1871,7 @@
 </file>
 
 <file path=ppt/slideLayouts/slideLayout1.xml><?xml version="1.0" encoding="utf-8"?>
-<p:sldLayout xmlns:a="http://schemas.openxmlformats.org/drawingml/2006/main" xmlns:r="http://schemas.openxmlformats.org/officeDocument/2006/relationships" xmlns:p="http://schemas.openxmlformats.org/presentationml/2006/main" type="title" preserve="1">
+<p:sldLayout xmlns:a="http://schemas.openxmlformats.org/drawingml/2006/main" xmlns:r="http://schemas.openxmlformats.org/officeDocument/2006/relationships" xmlns:p="http://schemas.openxmlformats.org/presentationml/2006/main" showMasterSp="0" type="title" preserve="1">
   <p:cSld name="Titelfolie">
     <p:spTree>
       <p:nvGrpSpPr>
@@ -1889,13 +1889,83 @@
       </p:grpSpPr>
       <p:sp>
         <p:nvSpPr>
-          <p:cNvPr id="2" name="Titel 1">
-            <a:extLst>
-              <a:ext uri="{FF2B5EF4-FFF2-40B4-BE49-F238E27FC236}">
-                <a16:creationId xmlns:a16="http://schemas.microsoft.com/office/drawing/2014/main" id="{C96953E6-98EB-4BF0-A842-1EDAA890E985}"/>
-              </a:ext>
-            </a:extLst>
-          </p:cNvPr>
+          <p:cNvPr id="7" name="Rectangle 6"/>
+          <p:cNvSpPr/>
+          <p:nvPr/>
+        </p:nvSpPr>
+        <p:spPr>
+          <a:xfrm>
+            <a:off x="3175" y="6400800"/>
+            <a:ext cx="12188825" cy="457200"/>
+          </a:xfrm>
+          <a:prstGeom prst="rect">
+            <a:avLst/>
+          </a:prstGeom>
+          <a:solidFill>
+            <a:schemeClr val="accent2"/>
+          </a:solidFill>
+          <a:ln>
+            <a:noFill/>
+          </a:ln>
+        </p:spPr>
+        <p:style>
+          <a:lnRef idx="2">
+            <a:schemeClr val="accent1">
+              <a:shade val="50000"/>
+            </a:schemeClr>
+          </a:lnRef>
+          <a:fillRef idx="1">
+            <a:schemeClr val="accent1"/>
+          </a:fillRef>
+          <a:effectRef idx="0">
+            <a:schemeClr val="accent1"/>
+          </a:effectRef>
+          <a:fontRef idx="minor">
+            <a:schemeClr val="lt1"/>
+          </a:fontRef>
+        </p:style>
+      </p:sp>
+      <p:sp>
+        <p:nvSpPr>
+          <p:cNvPr id="8" name="Rectangle 7"/>
+          <p:cNvSpPr/>
+          <p:nvPr/>
+        </p:nvSpPr>
+        <p:spPr>
+          <a:xfrm>
+            <a:off x="15" y="6334316"/>
+            <a:ext cx="12188825" cy="64008"/>
+          </a:xfrm>
+          <a:prstGeom prst="rect">
+            <a:avLst/>
+          </a:prstGeom>
+          <a:solidFill>
+            <a:schemeClr val="accent1"/>
+          </a:solidFill>
+          <a:ln>
+            <a:noFill/>
+          </a:ln>
+        </p:spPr>
+        <p:style>
+          <a:lnRef idx="2">
+            <a:schemeClr val="accent1">
+              <a:shade val="50000"/>
+            </a:schemeClr>
+          </a:lnRef>
+          <a:fillRef idx="1">
+            <a:schemeClr val="accent1"/>
+          </a:fillRef>
+          <a:effectRef idx="0">
+            <a:schemeClr val="accent1"/>
+          </a:effectRef>
+          <a:fontRef idx="minor">
+            <a:schemeClr val="lt1"/>
+          </a:fontRef>
+        </p:style>
+      </p:sp>
+      <p:sp>
+        <p:nvSpPr>
+          <p:cNvPr id="2" name="Title 1"/>
           <p:cNvSpPr>
             <a:spLocks noGrp="1"/>
           </p:cNvSpPr>
@@ -1905,15 +1975,27 @@
         </p:nvSpPr>
         <p:spPr>
           <a:xfrm>
-            <a:off x="1524000" y="1122363"/>
-            <a:ext cx="9144000" cy="2387600"/>
+            <a:off x="1097280" y="758952"/>
+            <a:ext cx="10058400" cy="3566160"/>
           </a:xfrm>
         </p:spPr>
         <p:txBody>
-          <a:bodyPr anchor="b"/>
+          <a:bodyPr anchor="b">
+            <a:normAutofit/>
+          </a:bodyPr>
           <a:lstStyle>
-            <a:lvl1pPr algn="ctr">
-              <a:defRPr sz="6000"/>
+            <a:lvl1pPr algn="l">
+              <a:lnSpc>
+                <a:spcPct val="85000"/>
+              </a:lnSpc>
+              <a:defRPr sz="8000" spc="-50" baseline="0">
+                <a:solidFill>
+                  <a:schemeClr val="tx1">
+                    <a:lumMod val="85000"/>
+                    <a:lumOff val="15000"/>
+                  </a:schemeClr>
+                </a:solidFill>
+              </a:defRPr>
             </a:lvl1pPr>
           </a:lstStyle>
           <a:p>
@@ -1921,19 +2003,13 @@
               <a:rPr lang="de-DE"/>
               <a:t>Mastertitelformat bearbeiten</a:t>
             </a:r>
-            <a:endParaRPr lang="en-US"/>
+            <a:endParaRPr lang="en-US" dirty="0"/>
           </a:p>
         </p:txBody>
       </p:sp>
       <p:sp>
         <p:nvSpPr>
-          <p:cNvPr id="3" name="Untertitel 2">
-            <a:extLst>
-              <a:ext uri="{FF2B5EF4-FFF2-40B4-BE49-F238E27FC236}">
-                <a16:creationId xmlns:a16="http://schemas.microsoft.com/office/drawing/2014/main" id="{B5C58100-8D8F-43AE-94C7-F7623252C444}"/>
-              </a:ext>
-            </a:extLst>
-          </p:cNvPr>
+          <p:cNvPr id="3" name="Subtitle 2"/>
           <p:cNvSpPr>
             <a:spLocks noGrp="1"/>
           </p:cNvSpPr>
@@ -1943,48 +2019,55 @@
         </p:nvSpPr>
         <p:spPr>
           <a:xfrm>
-            <a:off x="1524000" y="3602038"/>
-            <a:ext cx="9144000" cy="1655762"/>
+            <a:off x="1100051" y="4455621"/>
+            <a:ext cx="10058400" cy="1143000"/>
           </a:xfrm>
         </p:spPr>
         <p:txBody>
-          <a:bodyPr/>
+          <a:bodyPr lIns="91440" rIns="91440">
+            <a:normAutofit/>
+          </a:bodyPr>
           <a:lstStyle>
-            <a:lvl1pPr marL="0" indent="0" algn="ctr">
+            <a:lvl1pPr marL="0" indent="0" algn="l">
               <a:buNone/>
-              <a:defRPr sz="2400"/>
+              <a:defRPr sz="2400" cap="all" spc="200" baseline="0">
+                <a:solidFill>
+                  <a:schemeClr val="tx2"/>
+                </a:solidFill>
+                <a:latin typeface="+mj-lt"/>
+              </a:defRPr>
             </a:lvl1pPr>
             <a:lvl2pPr marL="457200" indent="0" algn="ctr">
               <a:buNone/>
-              <a:defRPr sz="2000"/>
+              <a:defRPr sz="2400"/>
             </a:lvl2pPr>
             <a:lvl3pPr marL="914400" indent="0" algn="ctr">
               <a:buNone/>
-              <a:defRPr sz="1800"/>
+              <a:defRPr sz="2400"/>
             </a:lvl3pPr>
             <a:lvl4pPr marL="1371600" indent="0" algn="ctr">
               <a:buNone/>
-              <a:defRPr sz="1600"/>
+              <a:defRPr sz="2000"/>
             </a:lvl4pPr>
             <a:lvl5pPr marL="1828800" indent="0" algn="ctr">
               <a:buNone/>
-              <a:defRPr sz="1600"/>
+              <a:defRPr sz="2000"/>
             </a:lvl5pPr>
             <a:lvl6pPr marL="2286000" indent="0" algn="ctr">
               <a:buNone/>
-              <a:defRPr sz="1600"/>
+              <a:defRPr sz="2000"/>
             </a:lvl6pPr>
             <a:lvl7pPr marL="2743200" indent="0" algn="ctr">
               <a:buNone/>
-              <a:defRPr sz="1600"/>
+              <a:defRPr sz="2000"/>
             </a:lvl7pPr>
             <a:lvl8pPr marL="3200400" indent="0" algn="ctr">
               <a:buNone/>
-              <a:defRPr sz="1600"/>
+              <a:defRPr sz="2000"/>
             </a:lvl8pPr>
             <a:lvl9pPr marL="3657600" indent="0" algn="ctr">
               <a:buNone/>
-              <a:defRPr sz="1600"/>
+              <a:defRPr sz="2000"/>
             </a:lvl9pPr>
           </a:lstStyle>
           <a:p>
@@ -1992,19 +2075,13 @@
               <a:rPr lang="de-DE"/>
               <a:t>Master-Untertitelformat bearbeiten</a:t>
             </a:r>
-            <a:endParaRPr lang="en-US"/>
+            <a:endParaRPr lang="en-US" dirty="0"/>
           </a:p>
         </p:txBody>
       </p:sp>
       <p:sp>
         <p:nvSpPr>
-          <p:cNvPr id="4" name="Datumsplatzhalter 3">
-            <a:extLst>
-              <a:ext uri="{FF2B5EF4-FFF2-40B4-BE49-F238E27FC236}">
-                <a16:creationId xmlns:a16="http://schemas.microsoft.com/office/drawing/2014/main" id="{8C5616D6-CBEB-4E65-95BA-65A5F2FAA992}"/>
-              </a:ext>
-            </a:extLst>
-          </p:cNvPr>
+          <p:cNvPr id="4" name="Date Placeholder 3"/>
           <p:cNvSpPr>
             <a:spLocks noGrp="1"/>
           </p:cNvSpPr>
@@ -2019,7 +2096,7 @@
           <a:p>
             <a:fld id="{F6C21922-584C-4088-ADC5-7905BF8E69C9}" type="datetimeFigureOut">
               <a:rPr lang="en-US" smtClean="0"/>
-              <a:t>8/31/2026</a:t>
+              <a:t>9/14/2026</a:t>
             </a:fld>
             <a:endParaRPr lang="en-US"/>
           </a:p>
@@ -2027,13 +2104,7 @@
       </p:sp>
       <p:sp>
         <p:nvSpPr>
-          <p:cNvPr id="5" name="Fußzeilenplatzhalter 4">
-            <a:extLst>
-              <a:ext uri="{FF2B5EF4-FFF2-40B4-BE49-F238E27FC236}">
-                <a16:creationId xmlns:a16="http://schemas.microsoft.com/office/drawing/2014/main" id="{B7469C11-5AC8-4CFE-9A15-6A0EDB091232}"/>
-              </a:ext>
-            </a:extLst>
-          </p:cNvPr>
+          <p:cNvPr id="5" name="Footer Placeholder 4"/>
           <p:cNvSpPr>
             <a:spLocks noGrp="1"/>
           </p:cNvSpPr>
@@ -2052,13 +2123,7 @@
       </p:sp>
       <p:sp>
         <p:nvSpPr>
-          <p:cNvPr id="6" name="Foliennummernplatzhalter 5">
-            <a:extLst>
-              <a:ext uri="{FF2B5EF4-FFF2-40B4-BE49-F238E27FC236}">
-                <a16:creationId xmlns:a16="http://schemas.microsoft.com/office/drawing/2014/main" id="{5413A51B-1BBC-437C-84FB-29D366E6CAC9}"/>
-              </a:ext>
-            </a:extLst>
-          </p:cNvPr>
+          <p:cNvPr id="6" name="Slide Number Placeholder 5"/>
           <p:cNvSpPr>
             <a:spLocks noGrp="1"/>
           </p:cNvSpPr>
@@ -2079,10 +2144,48 @@
           </a:p>
         </p:txBody>
       </p:sp>
+      <p:cxnSp>
+        <p:nvCxnSpPr>
+          <p:cNvPr id="9" name="Straight Connector 8"/>
+          <p:cNvCxnSpPr/>
+          <p:nvPr/>
+        </p:nvCxnSpPr>
+        <p:spPr>
+          <a:xfrm>
+            <a:off x="1207658" y="4343400"/>
+            <a:ext cx="9875520" cy="0"/>
+          </a:xfrm>
+          <a:prstGeom prst="line">
+            <a:avLst/>
+          </a:prstGeom>
+          <a:ln w="6350">
+            <a:solidFill>
+              <a:schemeClr val="tx1">
+                <a:lumMod val="50000"/>
+                <a:lumOff val="50000"/>
+              </a:schemeClr>
+            </a:solidFill>
+          </a:ln>
+        </p:spPr>
+        <p:style>
+          <a:lnRef idx="1">
+            <a:schemeClr val="accent1"/>
+          </a:lnRef>
+          <a:fillRef idx="0">
+            <a:schemeClr val="accent1"/>
+          </a:fillRef>
+          <a:effectRef idx="0">
+            <a:schemeClr val="accent1"/>
+          </a:effectRef>
+          <a:fontRef idx="minor">
+            <a:schemeClr val="tx1"/>
+          </a:fontRef>
+        </p:style>
+      </p:cxnSp>
     </p:spTree>
     <p:extLst>
       <p:ext uri="{BB962C8B-B14F-4D97-AF65-F5344CB8AC3E}">
-        <p14:creationId xmlns:p14="http://schemas.microsoft.com/office/powerpoint/2010/main" val="3533775456"/>
+        <p14:creationId xmlns:p14="http://schemas.microsoft.com/office/powerpoint/2010/main" val="3729723156"/>
       </p:ext>
     </p:extLst>
   </p:cSld>
@@ -2111,13 +2214,7 @@
       </p:grpSpPr>
       <p:sp>
         <p:nvSpPr>
-          <p:cNvPr id="2" name="Titel 1">
-            <a:extLst>
-              <a:ext uri="{FF2B5EF4-FFF2-40B4-BE49-F238E27FC236}">
-                <a16:creationId xmlns:a16="http://schemas.microsoft.com/office/drawing/2014/main" id="{E917B97B-A7D5-447C-A670-107588755E94}"/>
-              </a:ext>
-            </a:extLst>
-          </p:cNvPr>
+          <p:cNvPr id="2" name="Title 1"/>
           <p:cNvSpPr>
             <a:spLocks noGrp="1"/>
           </p:cNvSpPr>
@@ -2134,19 +2231,13 @@
               <a:rPr lang="de-DE"/>
               <a:t>Mastertitelformat bearbeiten</a:t>
             </a:r>
-            <a:endParaRPr lang="en-US"/>
+            <a:endParaRPr lang="en-US" dirty="0"/>
           </a:p>
         </p:txBody>
       </p:sp>
       <p:sp>
         <p:nvSpPr>
-          <p:cNvPr id="3" name="Vertikaler Textplatzhalter 2">
-            <a:extLst>
-              <a:ext uri="{FF2B5EF4-FFF2-40B4-BE49-F238E27FC236}">
-                <a16:creationId xmlns:a16="http://schemas.microsoft.com/office/drawing/2014/main" id="{03C15CD6-0068-4004-AECB-E60731415782}"/>
-              </a:ext>
-            </a:extLst>
-          </p:cNvPr>
+          <p:cNvPr id="3" name="Vertical Text Placeholder 2"/>
           <p:cNvSpPr>
             <a:spLocks noGrp="1"/>
           </p:cNvSpPr>
@@ -2156,7 +2247,7 @@
         </p:nvSpPr>
         <p:spPr/>
         <p:txBody>
-          <a:bodyPr vert="eaVert"/>
+          <a:bodyPr vert="eaVert" lIns="45720" tIns="0" rIns="45720" bIns="0"/>
           <a:lstStyle/>
           <a:p>
             <a:pPr lvl="0"/>
@@ -2192,19 +2283,13 @@
               <a:rPr lang="de-DE"/>
               <a:t>Fünfte Ebene</a:t>
             </a:r>
-            <a:endParaRPr lang="en-US"/>
+            <a:endParaRPr lang="en-US" dirty="0"/>
           </a:p>
         </p:txBody>
       </p:sp>
       <p:sp>
         <p:nvSpPr>
-          <p:cNvPr id="4" name="Datumsplatzhalter 3">
-            <a:extLst>
-              <a:ext uri="{FF2B5EF4-FFF2-40B4-BE49-F238E27FC236}">
-                <a16:creationId xmlns:a16="http://schemas.microsoft.com/office/drawing/2014/main" id="{2B8D7A43-68ED-4A4A-A945-1817C630A316}"/>
-              </a:ext>
-            </a:extLst>
-          </p:cNvPr>
+          <p:cNvPr id="4" name="Date Placeholder 3"/>
           <p:cNvSpPr>
             <a:spLocks noGrp="1"/>
           </p:cNvSpPr>
@@ -2219,7 +2304,7 @@
           <a:p>
             <a:fld id="{F6C21922-584C-4088-ADC5-7905BF8E69C9}" type="datetimeFigureOut">
               <a:rPr lang="en-US" smtClean="0"/>
-              <a:t>8/31/2026</a:t>
+              <a:t>9/14/2026</a:t>
             </a:fld>
             <a:endParaRPr lang="en-US"/>
           </a:p>
@@ -2227,13 +2312,7 @@
       </p:sp>
       <p:sp>
         <p:nvSpPr>
-          <p:cNvPr id="5" name="Fußzeilenplatzhalter 4">
-            <a:extLst>
-              <a:ext uri="{FF2B5EF4-FFF2-40B4-BE49-F238E27FC236}">
-                <a16:creationId xmlns:a16="http://schemas.microsoft.com/office/drawing/2014/main" id="{D1128ED7-B79F-4A7F-BA84-8C3BF2571C87}"/>
-              </a:ext>
-            </a:extLst>
-          </p:cNvPr>
+          <p:cNvPr id="5" name="Footer Placeholder 4"/>
           <p:cNvSpPr>
             <a:spLocks noGrp="1"/>
           </p:cNvSpPr>
@@ -2252,13 +2331,7 @@
       </p:sp>
       <p:sp>
         <p:nvSpPr>
-          <p:cNvPr id="6" name="Foliennummernplatzhalter 5">
-            <a:extLst>
-              <a:ext uri="{FF2B5EF4-FFF2-40B4-BE49-F238E27FC236}">
-                <a16:creationId xmlns:a16="http://schemas.microsoft.com/office/drawing/2014/main" id="{3A63A39D-9A53-42AB-B850-59A2345C9691}"/>
-              </a:ext>
-            </a:extLst>
-          </p:cNvPr>
+          <p:cNvPr id="6" name="Slide Number Placeholder 5"/>
           <p:cNvSpPr>
             <a:spLocks noGrp="1"/>
           </p:cNvSpPr>
@@ -2282,7 +2355,7 @@
     </p:spTree>
     <p:extLst>
       <p:ext uri="{BB962C8B-B14F-4D97-AF65-F5344CB8AC3E}">
-        <p14:creationId xmlns:p14="http://schemas.microsoft.com/office/powerpoint/2010/main" val="2307854756"/>
+        <p14:creationId xmlns:p14="http://schemas.microsoft.com/office/powerpoint/2010/main" val="668417142"/>
       </p:ext>
     </p:extLst>
   </p:cSld>
@@ -2293,7 +2366,7 @@
 </file>
 
 <file path=ppt/slideLayouts/slideLayout11.xml><?xml version="1.0" encoding="utf-8"?>
-<p:sldLayout xmlns:a="http://schemas.openxmlformats.org/drawingml/2006/main" xmlns:r="http://schemas.openxmlformats.org/officeDocument/2006/relationships" xmlns:p="http://schemas.openxmlformats.org/presentationml/2006/main" type="vertTitleAndTx" preserve="1">
+<p:sldLayout xmlns:a="http://schemas.openxmlformats.org/drawingml/2006/main" xmlns:r="http://schemas.openxmlformats.org/officeDocument/2006/relationships" xmlns:p="http://schemas.openxmlformats.org/presentationml/2006/main" showMasterSp="0" type="vertTitleAndTx" preserve="1">
   <p:cSld name="Vertikaler Titel und Text">
     <p:spTree>
       <p:nvGrpSpPr>
@@ -2311,13 +2384,83 @@
       </p:grpSpPr>
       <p:sp>
         <p:nvSpPr>
-          <p:cNvPr id="2" name="Vertikaler Titel 1">
-            <a:extLst>
-              <a:ext uri="{FF2B5EF4-FFF2-40B4-BE49-F238E27FC236}">
-                <a16:creationId xmlns:a16="http://schemas.microsoft.com/office/drawing/2014/main" id="{15968E7A-CCD1-48D6-8323-6A1BB8ECC13C}"/>
-              </a:ext>
-            </a:extLst>
-          </p:cNvPr>
+          <p:cNvPr id="7" name="Rectangle 6"/>
+          <p:cNvSpPr/>
+          <p:nvPr/>
+        </p:nvSpPr>
+        <p:spPr>
+          <a:xfrm>
+            <a:off x="3175" y="6400800"/>
+            <a:ext cx="12188825" cy="457200"/>
+          </a:xfrm>
+          <a:prstGeom prst="rect">
+            <a:avLst/>
+          </a:prstGeom>
+          <a:solidFill>
+            <a:schemeClr val="accent2"/>
+          </a:solidFill>
+          <a:ln>
+            <a:noFill/>
+          </a:ln>
+        </p:spPr>
+        <p:style>
+          <a:lnRef idx="2">
+            <a:schemeClr val="accent1">
+              <a:shade val="50000"/>
+            </a:schemeClr>
+          </a:lnRef>
+          <a:fillRef idx="1">
+            <a:schemeClr val="accent1"/>
+          </a:fillRef>
+          <a:effectRef idx="0">
+            <a:schemeClr val="accent1"/>
+          </a:effectRef>
+          <a:fontRef idx="minor">
+            <a:schemeClr val="lt1"/>
+          </a:fontRef>
+        </p:style>
+      </p:sp>
+      <p:sp>
+        <p:nvSpPr>
+          <p:cNvPr id="8" name="Rectangle 7"/>
+          <p:cNvSpPr/>
+          <p:nvPr/>
+        </p:nvSpPr>
+        <p:spPr>
+          <a:xfrm>
+            <a:off x="15" y="6334316"/>
+            <a:ext cx="12188825" cy="64008"/>
+          </a:xfrm>
+          <a:prstGeom prst="rect">
+            <a:avLst/>
+          </a:prstGeom>
+          <a:solidFill>
+            <a:schemeClr val="accent1"/>
+          </a:solidFill>
+          <a:ln>
+            <a:noFill/>
+          </a:ln>
+        </p:spPr>
+        <p:style>
+          <a:lnRef idx="2">
+            <a:schemeClr val="accent1">
+              <a:shade val="50000"/>
+            </a:schemeClr>
+          </a:lnRef>
+          <a:fillRef idx="1">
+            <a:schemeClr val="accent1"/>
+          </a:fillRef>
+          <a:effectRef idx="0">
+            <a:schemeClr val="accent1"/>
+          </a:effectRef>
+          <a:fontRef idx="minor">
+            <a:schemeClr val="lt1"/>
+          </a:fontRef>
+        </p:style>
+      </p:sp>
+      <p:sp>
+        <p:nvSpPr>
+          <p:cNvPr id="2" name="Vertical Title 1"/>
           <p:cNvSpPr>
             <a:spLocks noGrp="1"/>
           </p:cNvSpPr>
@@ -2327,8 +2470,8 @@
         </p:nvSpPr>
         <p:spPr>
           <a:xfrm>
-            <a:off x="8724900" y="365125"/>
-            <a:ext cx="2628900" cy="5811838"/>
+            <a:off x="8724900" y="412302"/>
+            <a:ext cx="2628900" cy="5759898"/>
           </a:xfrm>
         </p:spPr>
         <p:txBody>
@@ -2339,19 +2482,13 @@
               <a:rPr lang="de-DE"/>
               <a:t>Mastertitelformat bearbeiten</a:t>
             </a:r>
-            <a:endParaRPr lang="en-US"/>
+            <a:endParaRPr lang="en-US" dirty="0"/>
           </a:p>
         </p:txBody>
       </p:sp>
       <p:sp>
         <p:nvSpPr>
-          <p:cNvPr id="3" name="Vertikaler Textplatzhalter 2">
-            <a:extLst>
-              <a:ext uri="{FF2B5EF4-FFF2-40B4-BE49-F238E27FC236}">
-                <a16:creationId xmlns:a16="http://schemas.microsoft.com/office/drawing/2014/main" id="{EE588F4C-7D54-4D95-A778-EC0B1552EFE7}"/>
-              </a:ext>
-            </a:extLst>
-          </p:cNvPr>
+          <p:cNvPr id="3" name="Vertical Text Placeholder 2"/>
           <p:cNvSpPr>
             <a:spLocks noGrp="1"/>
           </p:cNvSpPr>
@@ -2361,12 +2498,12 @@
         </p:nvSpPr>
         <p:spPr>
           <a:xfrm>
-            <a:off x="838200" y="365125"/>
-            <a:ext cx="7734300" cy="5811838"/>
+            <a:off x="838200" y="412302"/>
+            <a:ext cx="7734300" cy="5759898"/>
           </a:xfrm>
         </p:spPr>
         <p:txBody>
-          <a:bodyPr vert="eaVert"/>
+          <a:bodyPr vert="eaVert" lIns="45720" tIns="0" rIns="45720" bIns="0"/>
           <a:lstStyle/>
           <a:p>
             <a:pPr lvl="0"/>
@@ -2402,19 +2539,13 @@
               <a:rPr lang="de-DE"/>
               <a:t>Fünfte Ebene</a:t>
             </a:r>
-            <a:endParaRPr lang="en-US"/>
+            <a:endParaRPr lang="en-US" dirty="0"/>
           </a:p>
         </p:txBody>
       </p:sp>
       <p:sp>
         <p:nvSpPr>
-          <p:cNvPr id="4" name="Datumsplatzhalter 3">
-            <a:extLst>
-              <a:ext uri="{FF2B5EF4-FFF2-40B4-BE49-F238E27FC236}">
-                <a16:creationId xmlns:a16="http://schemas.microsoft.com/office/drawing/2014/main" id="{8CAB3FF0-6670-4C07-9D81-707D39A98DA2}"/>
-              </a:ext>
-            </a:extLst>
-          </p:cNvPr>
+          <p:cNvPr id="4" name="Date Placeholder 3"/>
           <p:cNvSpPr>
             <a:spLocks noGrp="1"/>
           </p:cNvSpPr>
@@ -2429,7 +2560,7 @@
           <a:p>
             <a:fld id="{F6C21922-584C-4088-ADC5-7905BF8E69C9}" type="datetimeFigureOut">
               <a:rPr lang="en-US" smtClean="0"/>
-              <a:t>8/31/2026</a:t>
+              <a:t>9/14/2026</a:t>
             </a:fld>
             <a:endParaRPr lang="en-US"/>
           </a:p>
@@ -2437,13 +2568,7 @@
       </p:sp>
       <p:sp>
         <p:nvSpPr>
-          <p:cNvPr id="5" name="Fußzeilenplatzhalter 4">
-            <a:extLst>
-              <a:ext uri="{FF2B5EF4-FFF2-40B4-BE49-F238E27FC236}">
-                <a16:creationId xmlns:a16="http://schemas.microsoft.com/office/drawing/2014/main" id="{31506EC5-67F9-4074-858D-FAC9B898A07A}"/>
-              </a:ext>
-            </a:extLst>
-          </p:cNvPr>
+          <p:cNvPr id="5" name="Footer Placeholder 4"/>
           <p:cNvSpPr>
             <a:spLocks noGrp="1"/>
           </p:cNvSpPr>
@@ -2462,13 +2587,7 @@
       </p:sp>
       <p:sp>
         <p:nvSpPr>
-          <p:cNvPr id="6" name="Foliennummernplatzhalter 5">
-            <a:extLst>
-              <a:ext uri="{FF2B5EF4-FFF2-40B4-BE49-F238E27FC236}">
-                <a16:creationId xmlns:a16="http://schemas.microsoft.com/office/drawing/2014/main" id="{7CFD697C-27C2-409E-B21F-0977C198823C}"/>
-              </a:ext>
-            </a:extLst>
-          </p:cNvPr>
+          <p:cNvPr id="6" name="Slide Number Placeholder 5"/>
           <p:cNvSpPr>
             <a:spLocks noGrp="1"/>
           </p:cNvSpPr>
@@ -2492,7 +2611,7 @@
     </p:spTree>
     <p:extLst>
       <p:ext uri="{BB962C8B-B14F-4D97-AF65-F5344CB8AC3E}">
-        <p14:creationId xmlns:p14="http://schemas.microsoft.com/office/powerpoint/2010/main" val="3321268109"/>
+        <p14:creationId xmlns:p14="http://schemas.microsoft.com/office/powerpoint/2010/main" val="2408303886"/>
       </p:ext>
     </p:extLst>
   </p:cSld>
@@ -2521,13 +2640,7 @@
       </p:grpSpPr>
       <p:sp>
         <p:nvSpPr>
-          <p:cNvPr id="2" name="Titel 1">
-            <a:extLst>
-              <a:ext uri="{FF2B5EF4-FFF2-40B4-BE49-F238E27FC236}">
-                <a16:creationId xmlns:a16="http://schemas.microsoft.com/office/drawing/2014/main" id="{6CC1026B-EC6D-40C8-9DDF-C6DBEE935B4F}"/>
-              </a:ext>
-            </a:extLst>
-          </p:cNvPr>
+          <p:cNvPr id="2" name="Title 1"/>
           <p:cNvSpPr>
             <a:spLocks noGrp="1"/>
           </p:cNvSpPr>
@@ -2544,19 +2657,13 @@
               <a:rPr lang="de-DE"/>
               <a:t>Mastertitelformat bearbeiten</a:t>
             </a:r>
-            <a:endParaRPr lang="en-US"/>
+            <a:endParaRPr lang="en-US" dirty="0"/>
           </a:p>
         </p:txBody>
       </p:sp>
       <p:sp>
         <p:nvSpPr>
-          <p:cNvPr id="3" name="Inhaltsplatzhalter 2">
-            <a:extLst>
-              <a:ext uri="{FF2B5EF4-FFF2-40B4-BE49-F238E27FC236}">
-                <a16:creationId xmlns:a16="http://schemas.microsoft.com/office/drawing/2014/main" id="{AD7BE811-B016-4704-BF51-C6DB05650599}"/>
-              </a:ext>
-            </a:extLst>
-          </p:cNvPr>
+          <p:cNvPr id="3" name="Content Placeholder 2"/>
           <p:cNvSpPr>
             <a:spLocks noGrp="1"/>
           </p:cNvSpPr>
@@ -2602,19 +2709,13 @@
               <a:rPr lang="de-DE"/>
               <a:t>Fünfte Ebene</a:t>
             </a:r>
-            <a:endParaRPr lang="en-US"/>
+            <a:endParaRPr lang="en-US" dirty="0"/>
           </a:p>
         </p:txBody>
       </p:sp>
       <p:sp>
         <p:nvSpPr>
-          <p:cNvPr id="4" name="Datumsplatzhalter 3">
-            <a:extLst>
-              <a:ext uri="{FF2B5EF4-FFF2-40B4-BE49-F238E27FC236}">
-                <a16:creationId xmlns:a16="http://schemas.microsoft.com/office/drawing/2014/main" id="{9E84D85A-0EC2-4884-9FCD-97F8FC33BBA5}"/>
-              </a:ext>
-            </a:extLst>
-          </p:cNvPr>
+          <p:cNvPr id="4" name="Date Placeholder 3"/>
           <p:cNvSpPr>
             <a:spLocks noGrp="1"/>
           </p:cNvSpPr>
@@ -2629,7 +2730,7 @@
           <a:p>
             <a:fld id="{F6C21922-584C-4088-ADC5-7905BF8E69C9}" type="datetimeFigureOut">
               <a:rPr lang="en-US" smtClean="0"/>
-              <a:t>8/31/2026</a:t>
+              <a:t>9/14/2026</a:t>
             </a:fld>
             <a:endParaRPr lang="en-US"/>
           </a:p>
@@ -2637,13 +2738,7 @@
       </p:sp>
       <p:sp>
         <p:nvSpPr>
-          <p:cNvPr id="5" name="Fußzeilenplatzhalter 4">
-            <a:extLst>
-              <a:ext uri="{FF2B5EF4-FFF2-40B4-BE49-F238E27FC236}">
-                <a16:creationId xmlns:a16="http://schemas.microsoft.com/office/drawing/2014/main" id="{BBAD4A3C-534C-4392-A09C-64138D0A529C}"/>
-              </a:ext>
-            </a:extLst>
-          </p:cNvPr>
+          <p:cNvPr id="5" name="Footer Placeholder 4"/>
           <p:cNvSpPr>
             <a:spLocks noGrp="1"/>
           </p:cNvSpPr>
@@ -2662,13 +2757,7 @@
       </p:sp>
       <p:sp>
         <p:nvSpPr>
-          <p:cNvPr id="6" name="Foliennummernplatzhalter 5">
-            <a:extLst>
-              <a:ext uri="{FF2B5EF4-FFF2-40B4-BE49-F238E27FC236}">
-                <a16:creationId xmlns:a16="http://schemas.microsoft.com/office/drawing/2014/main" id="{5861D044-0458-4607-B0CE-4FC5466664E5}"/>
-              </a:ext>
-            </a:extLst>
-          </p:cNvPr>
+          <p:cNvPr id="6" name="Slide Number Placeholder 5"/>
           <p:cNvSpPr>
             <a:spLocks noGrp="1"/>
           </p:cNvSpPr>
@@ -2692,7 +2781,7 @@
     </p:spTree>
     <p:extLst>
       <p:ext uri="{BB962C8B-B14F-4D97-AF65-F5344CB8AC3E}">
-        <p14:creationId xmlns:p14="http://schemas.microsoft.com/office/powerpoint/2010/main" val="1116279381"/>
+        <p14:creationId xmlns:p14="http://schemas.microsoft.com/office/powerpoint/2010/main" val="3979474242"/>
       </p:ext>
     </p:extLst>
   </p:cSld>
@@ -2703,8 +2792,16 @@
 </file>
 
 <file path=ppt/slideLayouts/slideLayout3.xml><?xml version="1.0" encoding="utf-8"?>
-<p:sldLayout xmlns:a="http://schemas.openxmlformats.org/drawingml/2006/main" xmlns:r="http://schemas.openxmlformats.org/officeDocument/2006/relationships" xmlns:p="http://schemas.openxmlformats.org/presentationml/2006/main" type="secHead" preserve="1">
+<p:sldLayout xmlns:a="http://schemas.openxmlformats.org/drawingml/2006/main" xmlns:r="http://schemas.openxmlformats.org/officeDocument/2006/relationships" xmlns:p="http://schemas.openxmlformats.org/presentationml/2006/main" showMasterSp="0" type="secHead" preserve="1">
   <p:cSld name="Abschnitts-&#10;überschrift">
+    <p:bg>
+      <p:bgPr>
+        <a:solidFill>
+          <a:schemeClr val="bg1"/>
+        </a:solidFill>
+        <a:effectLst/>
+      </p:bgPr>
+    </p:bg>
     <p:spTree>
       <p:nvGrpSpPr>
         <p:cNvPr id="1" name=""/>
@@ -2721,13 +2818,83 @@
       </p:grpSpPr>
       <p:sp>
         <p:nvSpPr>
-          <p:cNvPr id="2" name="Titel 1">
-            <a:extLst>
-              <a:ext uri="{FF2B5EF4-FFF2-40B4-BE49-F238E27FC236}">
-                <a16:creationId xmlns:a16="http://schemas.microsoft.com/office/drawing/2014/main" id="{156776D7-8C56-4B8B-880B-C9D0F0A24D10}"/>
-              </a:ext>
-            </a:extLst>
-          </p:cNvPr>
+          <p:cNvPr id="7" name="Rectangle 6"/>
+          <p:cNvSpPr/>
+          <p:nvPr/>
+        </p:nvSpPr>
+        <p:spPr>
+          <a:xfrm>
+            <a:off x="3175" y="6400800"/>
+            <a:ext cx="12188825" cy="457200"/>
+          </a:xfrm>
+          <a:prstGeom prst="rect">
+            <a:avLst/>
+          </a:prstGeom>
+          <a:solidFill>
+            <a:schemeClr val="accent2"/>
+          </a:solidFill>
+          <a:ln>
+            <a:noFill/>
+          </a:ln>
+        </p:spPr>
+        <p:style>
+          <a:lnRef idx="2">
+            <a:schemeClr val="accent1">
+              <a:shade val="50000"/>
+            </a:schemeClr>
+          </a:lnRef>
+          <a:fillRef idx="1">
+            <a:schemeClr val="accent1"/>
+          </a:fillRef>
+          <a:effectRef idx="0">
+            <a:schemeClr val="accent1"/>
+          </a:effectRef>
+          <a:fontRef idx="minor">
+            <a:schemeClr val="lt1"/>
+          </a:fontRef>
+        </p:style>
+      </p:sp>
+      <p:sp>
+        <p:nvSpPr>
+          <p:cNvPr id="8" name="Rectangle 7"/>
+          <p:cNvSpPr/>
+          <p:nvPr/>
+        </p:nvSpPr>
+        <p:spPr>
+          <a:xfrm>
+            <a:off x="15" y="6334316"/>
+            <a:ext cx="12188825" cy="64008"/>
+          </a:xfrm>
+          <a:prstGeom prst="rect">
+            <a:avLst/>
+          </a:prstGeom>
+          <a:solidFill>
+            <a:schemeClr val="accent1"/>
+          </a:solidFill>
+          <a:ln>
+            <a:noFill/>
+          </a:ln>
+        </p:spPr>
+        <p:style>
+          <a:lnRef idx="2">
+            <a:schemeClr val="accent1">
+              <a:shade val="50000"/>
+            </a:schemeClr>
+          </a:lnRef>
+          <a:fillRef idx="1">
+            <a:schemeClr val="accent1"/>
+          </a:fillRef>
+          <a:effectRef idx="0">
+            <a:schemeClr val="accent1"/>
+          </a:effectRef>
+          <a:fontRef idx="minor">
+            <a:schemeClr val="lt1"/>
+          </a:fontRef>
+        </p:style>
+      </p:sp>
+      <p:sp>
+        <p:nvSpPr>
+          <p:cNvPr id="2" name="Title 1"/>
           <p:cNvSpPr>
             <a:spLocks noGrp="1"/>
           </p:cNvSpPr>
@@ -2737,15 +2904,27 @@
         </p:nvSpPr>
         <p:spPr>
           <a:xfrm>
-            <a:off x="831850" y="1709738"/>
-            <a:ext cx="10515600" cy="2852737"/>
+            <a:off x="1097280" y="758952"/>
+            <a:ext cx="10058400" cy="3566160"/>
           </a:xfrm>
         </p:spPr>
         <p:txBody>
-          <a:bodyPr anchor="b"/>
+          <a:bodyPr anchor="b" anchorCtr="0">
+            <a:normAutofit/>
+          </a:bodyPr>
           <a:lstStyle>
             <a:lvl1pPr>
-              <a:defRPr sz="6000"/>
+              <a:lnSpc>
+                <a:spcPct val="85000"/>
+              </a:lnSpc>
+              <a:defRPr sz="8000" b="0">
+                <a:solidFill>
+                  <a:schemeClr val="tx1">
+                    <a:lumMod val="85000"/>
+                    <a:lumOff val="15000"/>
+                  </a:schemeClr>
+                </a:solidFill>
+              </a:defRPr>
             </a:lvl1pPr>
           </a:lstStyle>
           <a:p>
@@ -2753,19 +2932,13 @@
               <a:rPr lang="de-DE"/>
               <a:t>Mastertitelformat bearbeiten</a:t>
             </a:r>
-            <a:endParaRPr lang="en-US"/>
+            <a:endParaRPr lang="en-US" dirty="0"/>
           </a:p>
         </p:txBody>
       </p:sp>
       <p:sp>
         <p:nvSpPr>
-          <p:cNvPr id="3" name="Textplatzhalter 2">
-            <a:extLst>
-              <a:ext uri="{FF2B5EF4-FFF2-40B4-BE49-F238E27FC236}">
-                <a16:creationId xmlns:a16="http://schemas.microsoft.com/office/drawing/2014/main" id="{81D38658-ACBC-4D19-9E71-102C7753AF24}"/>
-              </a:ext>
-            </a:extLst>
-          </p:cNvPr>
+          <p:cNvPr id="3" name="Text Placeholder 2"/>
           <p:cNvSpPr>
             <a:spLocks noGrp="1"/>
           </p:cNvSpPr>
@@ -2775,26 +2948,27 @@
         </p:nvSpPr>
         <p:spPr>
           <a:xfrm>
-            <a:off x="831850" y="4589463"/>
-            <a:ext cx="10515600" cy="1500187"/>
+            <a:off x="1097280" y="4453128"/>
+            <a:ext cx="10058400" cy="1143000"/>
           </a:xfrm>
         </p:spPr>
         <p:txBody>
-          <a:bodyPr/>
+          <a:bodyPr lIns="91440" rIns="91440" anchor="t" anchorCtr="0">
+            <a:normAutofit/>
+          </a:bodyPr>
           <a:lstStyle>
             <a:lvl1pPr marL="0" indent="0">
               <a:buNone/>
-              <a:defRPr sz="2400">
+              <a:defRPr sz="2400" cap="all" spc="200" baseline="0">
                 <a:solidFill>
-                  <a:schemeClr val="tx1">
-                    <a:tint val="75000"/>
-                  </a:schemeClr>
+                  <a:schemeClr val="tx2"/>
                 </a:solidFill>
+                <a:latin typeface="+mj-lt"/>
               </a:defRPr>
             </a:lvl1pPr>
             <a:lvl2pPr marL="457200" indent="0">
               <a:buNone/>
-              <a:defRPr sz="2000">
+              <a:defRPr sz="1800">
                 <a:solidFill>
                   <a:schemeClr val="tx1">
                     <a:tint val="75000"/>
@@ -2804,7 +2978,7 @@
             </a:lvl2pPr>
             <a:lvl3pPr marL="914400" indent="0">
               <a:buNone/>
-              <a:defRPr sz="1800">
+              <a:defRPr sz="1600">
                 <a:solidFill>
                   <a:schemeClr val="tx1">
                     <a:tint val="75000"/>
@@ -2814,7 +2988,7 @@
             </a:lvl3pPr>
             <a:lvl4pPr marL="1371600" indent="0">
               <a:buNone/>
-              <a:defRPr sz="1600">
+              <a:defRPr sz="1400">
                 <a:solidFill>
                   <a:schemeClr val="tx1">
                     <a:tint val="75000"/>
@@ -2824,7 +2998,7 @@
             </a:lvl4pPr>
             <a:lvl5pPr marL="1828800" indent="0">
               <a:buNone/>
-              <a:defRPr sz="1600">
+              <a:defRPr sz="1400">
                 <a:solidFill>
                   <a:schemeClr val="tx1">
                     <a:tint val="75000"/>
@@ -2834,7 +3008,7 @@
             </a:lvl5pPr>
             <a:lvl6pPr marL="2286000" indent="0">
               <a:buNone/>
-              <a:defRPr sz="1600">
+              <a:defRPr sz="1400">
                 <a:solidFill>
                   <a:schemeClr val="tx1">
                     <a:tint val="75000"/>
@@ -2844,7 +3018,7 @@
             </a:lvl6pPr>
             <a:lvl7pPr marL="2743200" indent="0">
               <a:buNone/>
-              <a:defRPr sz="1600">
+              <a:defRPr sz="1400">
                 <a:solidFill>
                   <a:schemeClr val="tx1">
                     <a:tint val="75000"/>
@@ -2854,7 +3028,7 @@
             </a:lvl7pPr>
             <a:lvl8pPr marL="3200400" indent="0">
               <a:buNone/>
-              <a:defRPr sz="1600">
+              <a:defRPr sz="1400">
                 <a:solidFill>
                   <a:schemeClr val="tx1">
                     <a:tint val="75000"/>
@@ -2864,7 +3038,7 @@
             </a:lvl8pPr>
             <a:lvl9pPr marL="3657600" indent="0">
               <a:buNone/>
-              <a:defRPr sz="1600">
+              <a:defRPr sz="1400">
                 <a:solidFill>
                   <a:schemeClr val="tx1">
                     <a:tint val="75000"/>
@@ -2884,13 +3058,7 @@
       </p:sp>
       <p:sp>
         <p:nvSpPr>
-          <p:cNvPr id="4" name="Datumsplatzhalter 3">
-            <a:extLst>
-              <a:ext uri="{FF2B5EF4-FFF2-40B4-BE49-F238E27FC236}">
-                <a16:creationId xmlns:a16="http://schemas.microsoft.com/office/drawing/2014/main" id="{8B9D8864-E3E6-4AE7-B698-BF2C0BAF1B91}"/>
-              </a:ext>
-            </a:extLst>
-          </p:cNvPr>
+          <p:cNvPr id="4" name="Date Placeholder 3"/>
           <p:cNvSpPr>
             <a:spLocks noGrp="1"/>
           </p:cNvSpPr>
@@ -2905,7 +3073,7 @@
           <a:p>
             <a:fld id="{F6C21922-584C-4088-ADC5-7905BF8E69C9}" type="datetimeFigureOut">
               <a:rPr lang="en-US" smtClean="0"/>
-              <a:t>8/31/2026</a:t>
+              <a:t>9/14/2026</a:t>
             </a:fld>
             <a:endParaRPr lang="en-US"/>
           </a:p>
@@ -2913,13 +3081,7 @@
       </p:sp>
       <p:sp>
         <p:nvSpPr>
-          <p:cNvPr id="5" name="Fußzeilenplatzhalter 4">
-            <a:extLst>
-              <a:ext uri="{FF2B5EF4-FFF2-40B4-BE49-F238E27FC236}">
-                <a16:creationId xmlns:a16="http://schemas.microsoft.com/office/drawing/2014/main" id="{FA91CE02-6067-4665-AEA9-5ED841B754CF}"/>
-              </a:ext>
-            </a:extLst>
-          </p:cNvPr>
+          <p:cNvPr id="5" name="Footer Placeholder 4"/>
           <p:cNvSpPr>
             <a:spLocks noGrp="1"/>
           </p:cNvSpPr>
@@ -2938,13 +3100,7 @@
       </p:sp>
       <p:sp>
         <p:nvSpPr>
-          <p:cNvPr id="6" name="Foliennummernplatzhalter 5">
-            <a:extLst>
-              <a:ext uri="{FF2B5EF4-FFF2-40B4-BE49-F238E27FC236}">
-                <a16:creationId xmlns:a16="http://schemas.microsoft.com/office/drawing/2014/main" id="{6B263B3D-927A-412B-87B7-3BA1426A8736}"/>
-              </a:ext>
-            </a:extLst>
-          </p:cNvPr>
+          <p:cNvPr id="6" name="Slide Number Placeholder 5"/>
           <p:cNvSpPr>
             <a:spLocks noGrp="1"/>
           </p:cNvSpPr>
@@ -2965,10 +3121,48 @@
           </a:p>
         </p:txBody>
       </p:sp>
+      <p:cxnSp>
+        <p:nvCxnSpPr>
+          <p:cNvPr id="9" name="Straight Connector 8"/>
+          <p:cNvCxnSpPr/>
+          <p:nvPr/>
+        </p:nvCxnSpPr>
+        <p:spPr>
+          <a:xfrm>
+            <a:off x="1207658" y="4343400"/>
+            <a:ext cx="9875520" cy="0"/>
+          </a:xfrm>
+          <a:prstGeom prst="line">
+            <a:avLst/>
+          </a:prstGeom>
+          <a:ln w="6350">
+            <a:solidFill>
+              <a:schemeClr val="tx1">
+                <a:lumMod val="50000"/>
+                <a:lumOff val="50000"/>
+              </a:schemeClr>
+            </a:solidFill>
+          </a:ln>
+        </p:spPr>
+        <p:style>
+          <a:lnRef idx="1">
+            <a:schemeClr val="accent1"/>
+          </a:lnRef>
+          <a:fillRef idx="0">
+            <a:schemeClr val="accent1"/>
+          </a:fillRef>
+          <a:effectRef idx="0">
+            <a:schemeClr val="accent1"/>
+          </a:effectRef>
+          <a:fontRef idx="minor">
+            <a:schemeClr val="tx1"/>
+          </a:fontRef>
+        </p:style>
+      </p:cxnSp>
     </p:spTree>
     <p:extLst>
       <p:ext uri="{BB962C8B-B14F-4D97-AF65-F5344CB8AC3E}">
-        <p14:creationId xmlns:p14="http://schemas.microsoft.com/office/powerpoint/2010/main" val="3341525591"/>
+        <p14:creationId xmlns:p14="http://schemas.microsoft.com/office/powerpoint/2010/main" val="2759712367"/>
       </p:ext>
     </p:extLst>
   </p:cSld>
@@ -2997,13 +3191,7 @@
       </p:grpSpPr>
       <p:sp>
         <p:nvSpPr>
-          <p:cNvPr id="2" name="Titel 1">
-            <a:extLst>
-              <a:ext uri="{FF2B5EF4-FFF2-40B4-BE49-F238E27FC236}">
-                <a16:creationId xmlns:a16="http://schemas.microsoft.com/office/drawing/2014/main" id="{2FD40A30-E8F0-47CB-893A-3FDA09B3FEBE}"/>
-              </a:ext>
-            </a:extLst>
-          </p:cNvPr>
+          <p:cNvPr id="8" name="Title 7"/>
           <p:cNvSpPr>
             <a:spLocks noGrp="1"/>
           </p:cNvSpPr>
@@ -3011,7 +3199,12 @@
             <p:ph type="title"/>
           </p:nvPr>
         </p:nvSpPr>
-        <p:spPr/>
+        <p:spPr>
+          <a:xfrm>
+            <a:off x="1097280" y="286603"/>
+            <a:ext cx="10058400" cy="1450757"/>
+          </a:xfrm>
+        </p:spPr>
         <p:txBody>
           <a:bodyPr/>
           <a:lstStyle/>
@@ -3020,19 +3213,13 @@
               <a:rPr lang="de-DE"/>
               <a:t>Mastertitelformat bearbeiten</a:t>
             </a:r>
-            <a:endParaRPr lang="en-US"/>
+            <a:endParaRPr lang="en-US" dirty="0"/>
           </a:p>
         </p:txBody>
       </p:sp>
       <p:sp>
         <p:nvSpPr>
-          <p:cNvPr id="3" name="Inhaltsplatzhalter 2">
-            <a:extLst>
-              <a:ext uri="{FF2B5EF4-FFF2-40B4-BE49-F238E27FC236}">
-                <a16:creationId xmlns:a16="http://schemas.microsoft.com/office/drawing/2014/main" id="{6C4BED15-EBE8-4A41-ABE2-8FE018D03447}"/>
-              </a:ext>
-            </a:extLst>
-          </p:cNvPr>
+          <p:cNvPr id="3" name="Content Placeholder 2"/>
           <p:cNvSpPr>
             <a:spLocks noGrp="1"/>
           </p:cNvSpPr>
@@ -3042,8 +3229,8 @@
         </p:nvSpPr>
         <p:spPr>
           <a:xfrm>
-            <a:off x="838200" y="1825625"/>
-            <a:ext cx="5181600" cy="4351338"/>
+            <a:off x="1097278" y="1845734"/>
+            <a:ext cx="4937760" cy="4023360"/>
           </a:xfrm>
         </p:spPr>
         <p:txBody>
@@ -3083,19 +3270,13 @@
               <a:rPr lang="de-DE"/>
               <a:t>Fünfte Ebene</a:t>
             </a:r>
-            <a:endParaRPr lang="en-US"/>
+            <a:endParaRPr lang="en-US" dirty="0"/>
           </a:p>
         </p:txBody>
       </p:sp>
       <p:sp>
         <p:nvSpPr>
-          <p:cNvPr id="4" name="Inhaltsplatzhalter 3">
-            <a:extLst>
-              <a:ext uri="{FF2B5EF4-FFF2-40B4-BE49-F238E27FC236}">
-                <a16:creationId xmlns:a16="http://schemas.microsoft.com/office/drawing/2014/main" id="{5E9AE43F-A1B4-49CC-92A6-D259C9428507}"/>
-              </a:ext>
-            </a:extLst>
-          </p:cNvPr>
+          <p:cNvPr id="4" name="Content Placeholder 3"/>
           <p:cNvSpPr>
             <a:spLocks noGrp="1"/>
           </p:cNvSpPr>
@@ -3105,8 +3286,8 @@
         </p:nvSpPr>
         <p:spPr>
           <a:xfrm>
-            <a:off x="6172200" y="1825625"/>
-            <a:ext cx="5181600" cy="4351338"/>
+            <a:off x="6217920" y="1845735"/>
+            <a:ext cx="4937760" cy="4023360"/>
           </a:xfrm>
         </p:spPr>
         <p:txBody>
@@ -3146,19 +3327,13 @@
               <a:rPr lang="de-DE"/>
               <a:t>Fünfte Ebene</a:t>
             </a:r>
-            <a:endParaRPr lang="en-US"/>
+            <a:endParaRPr lang="en-US" dirty="0"/>
           </a:p>
         </p:txBody>
       </p:sp>
       <p:sp>
         <p:nvSpPr>
-          <p:cNvPr id="5" name="Datumsplatzhalter 4">
-            <a:extLst>
-              <a:ext uri="{FF2B5EF4-FFF2-40B4-BE49-F238E27FC236}">
-                <a16:creationId xmlns:a16="http://schemas.microsoft.com/office/drawing/2014/main" id="{5F4FEB9E-6767-4B4B-ABE5-AE8173FDF650}"/>
-              </a:ext>
-            </a:extLst>
-          </p:cNvPr>
+          <p:cNvPr id="5" name="Date Placeholder 4"/>
           <p:cNvSpPr>
             <a:spLocks noGrp="1"/>
           </p:cNvSpPr>
@@ -3173,7 +3348,7 @@
           <a:p>
             <a:fld id="{F6C21922-584C-4088-ADC5-7905BF8E69C9}" type="datetimeFigureOut">
               <a:rPr lang="en-US" smtClean="0"/>
-              <a:t>8/31/2026</a:t>
+              <a:t>9/14/2026</a:t>
             </a:fld>
             <a:endParaRPr lang="en-US"/>
           </a:p>
@@ -3181,13 +3356,7 @@
       </p:sp>
       <p:sp>
         <p:nvSpPr>
-          <p:cNvPr id="6" name="Fußzeilenplatzhalter 5">
-            <a:extLst>
-              <a:ext uri="{FF2B5EF4-FFF2-40B4-BE49-F238E27FC236}">
-                <a16:creationId xmlns:a16="http://schemas.microsoft.com/office/drawing/2014/main" id="{04AF64CB-E9C8-4CBF-B417-7FE39C1B21DF}"/>
-              </a:ext>
-            </a:extLst>
-          </p:cNvPr>
+          <p:cNvPr id="6" name="Footer Placeholder 5"/>
           <p:cNvSpPr>
             <a:spLocks noGrp="1"/>
           </p:cNvSpPr>
@@ -3206,13 +3375,7 @@
       </p:sp>
       <p:sp>
         <p:nvSpPr>
-          <p:cNvPr id="7" name="Foliennummernplatzhalter 6">
-            <a:extLst>
-              <a:ext uri="{FF2B5EF4-FFF2-40B4-BE49-F238E27FC236}">
-                <a16:creationId xmlns:a16="http://schemas.microsoft.com/office/drawing/2014/main" id="{3C4C4E7D-1083-4D02-90A3-F2BC9375DDE7}"/>
-              </a:ext>
-            </a:extLst>
-          </p:cNvPr>
+          <p:cNvPr id="7" name="Slide Number Placeholder 6"/>
           <p:cNvSpPr>
             <a:spLocks noGrp="1"/>
           </p:cNvSpPr>
@@ -3236,7 +3399,7 @@
     </p:spTree>
     <p:extLst>
       <p:ext uri="{BB962C8B-B14F-4D97-AF65-F5344CB8AC3E}">
-        <p14:creationId xmlns:p14="http://schemas.microsoft.com/office/powerpoint/2010/main" val="1357301149"/>
+        <p14:creationId xmlns:p14="http://schemas.microsoft.com/office/powerpoint/2010/main" val="3695524370"/>
       </p:ext>
     </p:extLst>
   </p:cSld>
@@ -3265,13 +3428,7 @@
       </p:grpSpPr>
       <p:sp>
         <p:nvSpPr>
-          <p:cNvPr id="2" name="Titel 1">
-            <a:extLst>
-              <a:ext uri="{FF2B5EF4-FFF2-40B4-BE49-F238E27FC236}">
-                <a16:creationId xmlns:a16="http://schemas.microsoft.com/office/drawing/2014/main" id="{866FE23F-7850-4EA5-BAB5-0CEC5B9647C1}"/>
-              </a:ext>
-            </a:extLst>
-          </p:cNvPr>
+          <p:cNvPr id="10" name="Title 9"/>
           <p:cNvSpPr>
             <a:spLocks noGrp="1"/>
           </p:cNvSpPr>
@@ -3281,8 +3438,8 @@
         </p:nvSpPr>
         <p:spPr>
           <a:xfrm>
-            <a:off x="839788" y="365125"/>
-            <a:ext cx="10515600" cy="1325563"/>
+            <a:off x="1097280" y="286603"/>
+            <a:ext cx="10058400" cy="1450757"/>
           </a:xfrm>
         </p:spPr>
         <p:txBody>
@@ -3293,19 +3450,13 @@
               <a:rPr lang="de-DE"/>
               <a:t>Mastertitelformat bearbeiten</a:t>
             </a:r>
-            <a:endParaRPr lang="en-US"/>
+            <a:endParaRPr lang="en-US" dirty="0"/>
           </a:p>
         </p:txBody>
       </p:sp>
       <p:sp>
         <p:nvSpPr>
-          <p:cNvPr id="3" name="Textplatzhalter 2">
-            <a:extLst>
-              <a:ext uri="{FF2B5EF4-FFF2-40B4-BE49-F238E27FC236}">
-                <a16:creationId xmlns:a16="http://schemas.microsoft.com/office/drawing/2014/main" id="{BCFF0E5F-6BA6-42BF-B0FE-15CA0F089CAB}"/>
-              </a:ext>
-            </a:extLst>
-          </p:cNvPr>
+          <p:cNvPr id="3" name="Text Placeholder 2"/>
           <p:cNvSpPr>
             <a:spLocks noGrp="1"/>
           </p:cNvSpPr>
@@ -3315,16 +3466,22 @@
         </p:nvSpPr>
         <p:spPr>
           <a:xfrm>
-            <a:off x="839788" y="1681163"/>
-            <a:ext cx="5157787" cy="823912"/>
+            <a:off x="1097280" y="1846052"/>
+            <a:ext cx="4937760" cy="736282"/>
           </a:xfrm>
         </p:spPr>
         <p:txBody>
-          <a:bodyPr anchor="b"/>
+          <a:bodyPr lIns="91440" rIns="91440" anchor="ctr">
+            <a:normAutofit/>
+          </a:bodyPr>
           <a:lstStyle>
             <a:lvl1pPr marL="0" indent="0">
               <a:buNone/>
-              <a:defRPr sz="2400" b="1"/>
+              <a:defRPr sz="2000" b="0" cap="all" baseline="0">
+                <a:solidFill>
+                  <a:schemeClr val="tx2"/>
+                </a:solidFill>
+              </a:defRPr>
             </a:lvl1pPr>
             <a:lvl2pPr marL="457200" indent="0">
               <a:buNone/>
@@ -3370,13 +3527,7 @@
       </p:sp>
       <p:sp>
         <p:nvSpPr>
-          <p:cNvPr id="4" name="Inhaltsplatzhalter 3">
-            <a:extLst>
-              <a:ext uri="{FF2B5EF4-FFF2-40B4-BE49-F238E27FC236}">
-                <a16:creationId xmlns:a16="http://schemas.microsoft.com/office/drawing/2014/main" id="{75BC8E1B-802C-425F-94D5-B1D745A81630}"/>
-              </a:ext>
-            </a:extLst>
-          </p:cNvPr>
+          <p:cNvPr id="4" name="Content Placeholder 3"/>
           <p:cNvSpPr>
             <a:spLocks noGrp="1"/>
           </p:cNvSpPr>
@@ -3386,8 +3537,8 @@
         </p:nvSpPr>
         <p:spPr>
           <a:xfrm>
-            <a:off x="839788" y="2505075"/>
-            <a:ext cx="5157787" cy="3684588"/>
+            <a:off x="1097280" y="2582334"/>
+            <a:ext cx="4937760" cy="3378200"/>
           </a:xfrm>
         </p:spPr>
         <p:txBody>
@@ -3427,19 +3578,13 @@
               <a:rPr lang="de-DE"/>
               <a:t>Fünfte Ebene</a:t>
             </a:r>
-            <a:endParaRPr lang="en-US"/>
+            <a:endParaRPr lang="en-US" dirty="0"/>
           </a:p>
         </p:txBody>
       </p:sp>
       <p:sp>
         <p:nvSpPr>
-          <p:cNvPr id="5" name="Textplatzhalter 4">
-            <a:extLst>
-              <a:ext uri="{FF2B5EF4-FFF2-40B4-BE49-F238E27FC236}">
-                <a16:creationId xmlns:a16="http://schemas.microsoft.com/office/drawing/2014/main" id="{52D65FD7-2A1C-4A4E-81E5-11F73DC3C91F}"/>
-              </a:ext>
-            </a:extLst>
-          </p:cNvPr>
+          <p:cNvPr id="5" name="Text Placeholder 4"/>
           <p:cNvSpPr>
             <a:spLocks noGrp="1"/>
           </p:cNvSpPr>
@@ -3449,16 +3594,22 @@
         </p:nvSpPr>
         <p:spPr>
           <a:xfrm>
-            <a:off x="6172200" y="1681163"/>
-            <a:ext cx="5183188" cy="823912"/>
+            <a:off x="6217920" y="1846052"/>
+            <a:ext cx="4937760" cy="736282"/>
           </a:xfrm>
         </p:spPr>
         <p:txBody>
-          <a:bodyPr anchor="b"/>
+          <a:bodyPr lIns="91440" rIns="91440" anchor="ctr">
+            <a:normAutofit/>
+          </a:bodyPr>
           <a:lstStyle>
             <a:lvl1pPr marL="0" indent="0">
               <a:buNone/>
-              <a:defRPr sz="2400" b="1"/>
+              <a:defRPr sz="2000" b="0" cap="all" baseline="0">
+                <a:solidFill>
+                  <a:schemeClr val="tx2"/>
+                </a:solidFill>
+              </a:defRPr>
             </a:lvl1pPr>
             <a:lvl2pPr marL="457200" indent="0">
               <a:buNone/>
@@ -3504,13 +3655,7 @@
       </p:sp>
       <p:sp>
         <p:nvSpPr>
-          <p:cNvPr id="6" name="Inhaltsplatzhalter 5">
-            <a:extLst>
-              <a:ext uri="{FF2B5EF4-FFF2-40B4-BE49-F238E27FC236}">
-                <a16:creationId xmlns:a16="http://schemas.microsoft.com/office/drawing/2014/main" id="{1FEFA2C6-D5CA-440E-95B4-A09DE30CC370}"/>
-              </a:ext>
-            </a:extLst>
-          </p:cNvPr>
+          <p:cNvPr id="6" name="Content Placeholder 5"/>
           <p:cNvSpPr>
             <a:spLocks noGrp="1"/>
           </p:cNvSpPr>
@@ -3520,8 +3665,8 @@
         </p:nvSpPr>
         <p:spPr>
           <a:xfrm>
-            <a:off x="6172200" y="2505075"/>
-            <a:ext cx="5183188" cy="3684588"/>
+            <a:off x="6217920" y="2582334"/>
+            <a:ext cx="4937760" cy="3378200"/>
           </a:xfrm>
         </p:spPr>
         <p:txBody>
@@ -3561,19 +3706,13 @@
               <a:rPr lang="de-DE"/>
               <a:t>Fünfte Ebene</a:t>
             </a:r>
-            <a:endParaRPr lang="en-US"/>
+            <a:endParaRPr lang="en-US" dirty="0"/>
           </a:p>
         </p:txBody>
       </p:sp>
       <p:sp>
         <p:nvSpPr>
-          <p:cNvPr id="7" name="Datumsplatzhalter 6">
-            <a:extLst>
-              <a:ext uri="{FF2B5EF4-FFF2-40B4-BE49-F238E27FC236}">
-                <a16:creationId xmlns:a16="http://schemas.microsoft.com/office/drawing/2014/main" id="{F3654CAE-8500-4A00-BBD1-3DF657BF991F}"/>
-              </a:ext>
-            </a:extLst>
-          </p:cNvPr>
+          <p:cNvPr id="7" name="Date Placeholder 6"/>
           <p:cNvSpPr>
             <a:spLocks noGrp="1"/>
           </p:cNvSpPr>
@@ -3588,7 +3727,7 @@
           <a:p>
             <a:fld id="{F6C21922-584C-4088-ADC5-7905BF8E69C9}" type="datetimeFigureOut">
               <a:rPr lang="en-US" smtClean="0"/>
-              <a:t>8/31/2026</a:t>
+              <a:t>9/14/2026</a:t>
             </a:fld>
             <a:endParaRPr lang="en-US"/>
           </a:p>
@@ -3596,13 +3735,7 @@
       </p:sp>
       <p:sp>
         <p:nvSpPr>
-          <p:cNvPr id="8" name="Fußzeilenplatzhalter 7">
-            <a:extLst>
-              <a:ext uri="{FF2B5EF4-FFF2-40B4-BE49-F238E27FC236}">
-                <a16:creationId xmlns:a16="http://schemas.microsoft.com/office/drawing/2014/main" id="{9580D363-87E8-40BA-A039-E111C91A8254}"/>
-              </a:ext>
-            </a:extLst>
-          </p:cNvPr>
+          <p:cNvPr id="8" name="Footer Placeholder 7"/>
           <p:cNvSpPr>
             <a:spLocks noGrp="1"/>
           </p:cNvSpPr>
@@ -3621,13 +3754,7 @@
       </p:sp>
       <p:sp>
         <p:nvSpPr>
-          <p:cNvPr id="9" name="Foliennummernplatzhalter 8">
-            <a:extLst>
-              <a:ext uri="{FF2B5EF4-FFF2-40B4-BE49-F238E27FC236}">
-                <a16:creationId xmlns:a16="http://schemas.microsoft.com/office/drawing/2014/main" id="{B3D521B9-7CAB-410F-8D92-B9C570BE2F89}"/>
-              </a:ext>
-            </a:extLst>
-          </p:cNvPr>
+          <p:cNvPr id="9" name="Slide Number Placeholder 8"/>
           <p:cNvSpPr>
             <a:spLocks noGrp="1"/>
           </p:cNvSpPr>
@@ -3651,7 +3778,7 @@
     </p:spTree>
     <p:extLst>
       <p:ext uri="{BB962C8B-B14F-4D97-AF65-F5344CB8AC3E}">
-        <p14:creationId xmlns:p14="http://schemas.microsoft.com/office/powerpoint/2010/main" val="357552314"/>
+        <p14:creationId xmlns:p14="http://schemas.microsoft.com/office/powerpoint/2010/main" val="2572106281"/>
       </p:ext>
     </p:extLst>
   </p:cSld>
@@ -3680,13 +3807,7 @@
       </p:grpSpPr>
       <p:sp>
         <p:nvSpPr>
-          <p:cNvPr id="2" name="Titel 1">
-            <a:extLst>
-              <a:ext uri="{FF2B5EF4-FFF2-40B4-BE49-F238E27FC236}">
-                <a16:creationId xmlns:a16="http://schemas.microsoft.com/office/drawing/2014/main" id="{7C680C2E-739B-404D-ABA2-15576CA48DD1}"/>
-              </a:ext>
-            </a:extLst>
-          </p:cNvPr>
+          <p:cNvPr id="2" name="Title 1"/>
           <p:cNvSpPr>
             <a:spLocks noGrp="1"/>
           </p:cNvSpPr>
@@ -3703,19 +3824,13 @@
               <a:rPr lang="de-DE"/>
               <a:t>Mastertitelformat bearbeiten</a:t>
             </a:r>
-            <a:endParaRPr lang="en-US"/>
+            <a:endParaRPr lang="en-US" dirty="0"/>
           </a:p>
         </p:txBody>
       </p:sp>
       <p:sp>
         <p:nvSpPr>
-          <p:cNvPr id="3" name="Datumsplatzhalter 2">
-            <a:extLst>
-              <a:ext uri="{FF2B5EF4-FFF2-40B4-BE49-F238E27FC236}">
-                <a16:creationId xmlns:a16="http://schemas.microsoft.com/office/drawing/2014/main" id="{40336A60-6CB3-4C10-B8B4-B570EB3FDEB6}"/>
-              </a:ext>
-            </a:extLst>
-          </p:cNvPr>
+          <p:cNvPr id="3" name="Date Placeholder 2"/>
           <p:cNvSpPr>
             <a:spLocks noGrp="1"/>
           </p:cNvSpPr>
@@ -3730,7 +3845,7 @@
           <a:p>
             <a:fld id="{F6C21922-584C-4088-ADC5-7905BF8E69C9}" type="datetimeFigureOut">
               <a:rPr lang="en-US" smtClean="0"/>
-              <a:t>8/31/2026</a:t>
+              <a:t>9/14/2026</a:t>
             </a:fld>
             <a:endParaRPr lang="en-US"/>
           </a:p>
@@ -3738,13 +3853,7 @@
       </p:sp>
       <p:sp>
         <p:nvSpPr>
-          <p:cNvPr id="4" name="Fußzeilenplatzhalter 3">
-            <a:extLst>
-              <a:ext uri="{FF2B5EF4-FFF2-40B4-BE49-F238E27FC236}">
-                <a16:creationId xmlns:a16="http://schemas.microsoft.com/office/drawing/2014/main" id="{8F08A491-5A9E-4FCE-9437-6B8FDB5C655C}"/>
-              </a:ext>
-            </a:extLst>
-          </p:cNvPr>
+          <p:cNvPr id="4" name="Footer Placeholder 3"/>
           <p:cNvSpPr>
             <a:spLocks noGrp="1"/>
           </p:cNvSpPr>
@@ -3763,13 +3872,7 @@
       </p:sp>
       <p:sp>
         <p:nvSpPr>
-          <p:cNvPr id="5" name="Foliennummernplatzhalter 4">
-            <a:extLst>
-              <a:ext uri="{FF2B5EF4-FFF2-40B4-BE49-F238E27FC236}">
-                <a16:creationId xmlns:a16="http://schemas.microsoft.com/office/drawing/2014/main" id="{8FDF20CB-2802-4F4C-8BED-59F74D2BAA9B}"/>
-              </a:ext>
-            </a:extLst>
-          </p:cNvPr>
+          <p:cNvPr id="5" name="Slide Number Placeholder 4"/>
           <p:cNvSpPr>
             <a:spLocks noGrp="1"/>
           </p:cNvSpPr>
@@ -3793,7 +3896,7 @@
     </p:spTree>
     <p:extLst>
       <p:ext uri="{BB962C8B-B14F-4D97-AF65-F5344CB8AC3E}">
-        <p14:creationId xmlns:p14="http://schemas.microsoft.com/office/powerpoint/2010/main" val="557558333"/>
+        <p14:creationId xmlns:p14="http://schemas.microsoft.com/office/powerpoint/2010/main" val="3453894838"/>
       </p:ext>
     </p:extLst>
   </p:cSld>
@@ -3804,7 +3907,7 @@
 </file>
 
 <file path=ppt/slideLayouts/slideLayout7.xml><?xml version="1.0" encoding="utf-8"?>
-<p:sldLayout xmlns:a="http://schemas.openxmlformats.org/drawingml/2006/main" xmlns:r="http://schemas.openxmlformats.org/officeDocument/2006/relationships" xmlns:p="http://schemas.openxmlformats.org/presentationml/2006/main" type="blank" preserve="1">
+<p:sldLayout xmlns:a="http://schemas.openxmlformats.org/drawingml/2006/main" xmlns:r="http://schemas.openxmlformats.org/officeDocument/2006/relationships" xmlns:p="http://schemas.openxmlformats.org/presentationml/2006/main" showMasterSp="0" type="blank" preserve="1">
   <p:cSld name="Leer">
     <p:spTree>
       <p:nvGrpSpPr>
@@ -3822,13 +3925,83 @@
       </p:grpSpPr>
       <p:sp>
         <p:nvSpPr>
-          <p:cNvPr id="2" name="Datumsplatzhalter 1">
-            <a:extLst>
-              <a:ext uri="{FF2B5EF4-FFF2-40B4-BE49-F238E27FC236}">
-                <a16:creationId xmlns:a16="http://schemas.microsoft.com/office/drawing/2014/main" id="{345A2457-C9A5-4032-B078-F72D438BBE6E}"/>
-              </a:ext>
-            </a:extLst>
-          </p:cNvPr>
+          <p:cNvPr id="5" name="Rectangle 4"/>
+          <p:cNvSpPr/>
+          <p:nvPr/>
+        </p:nvSpPr>
+        <p:spPr>
+          <a:xfrm>
+            <a:off x="3175" y="6400800"/>
+            <a:ext cx="12188825" cy="457200"/>
+          </a:xfrm>
+          <a:prstGeom prst="rect">
+            <a:avLst/>
+          </a:prstGeom>
+          <a:solidFill>
+            <a:schemeClr val="accent2"/>
+          </a:solidFill>
+          <a:ln>
+            <a:noFill/>
+          </a:ln>
+        </p:spPr>
+        <p:style>
+          <a:lnRef idx="2">
+            <a:schemeClr val="accent1">
+              <a:shade val="50000"/>
+            </a:schemeClr>
+          </a:lnRef>
+          <a:fillRef idx="1">
+            <a:schemeClr val="accent1"/>
+          </a:fillRef>
+          <a:effectRef idx="0">
+            <a:schemeClr val="accent1"/>
+          </a:effectRef>
+          <a:fontRef idx="minor">
+            <a:schemeClr val="lt1"/>
+          </a:fontRef>
+        </p:style>
+      </p:sp>
+      <p:sp>
+        <p:nvSpPr>
+          <p:cNvPr id="6" name="Rectangle 5"/>
+          <p:cNvSpPr/>
+          <p:nvPr/>
+        </p:nvSpPr>
+        <p:spPr>
+          <a:xfrm>
+            <a:off x="15" y="6334316"/>
+            <a:ext cx="12188825" cy="64008"/>
+          </a:xfrm>
+          <a:prstGeom prst="rect">
+            <a:avLst/>
+          </a:prstGeom>
+          <a:solidFill>
+            <a:schemeClr val="accent1"/>
+          </a:solidFill>
+          <a:ln>
+            <a:noFill/>
+          </a:ln>
+        </p:spPr>
+        <p:style>
+          <a:lnRef idx="2">
+            <a:schemeClr val="accent1">
+              <a:shade val="50000"/>
+            </a:schemeClr>
+          </a:lnRef>
+          <a:fillRef idx="1">
+            <a:schemeClr val="accent1"/>
+          </a:fillRef>
+          <a:effectRef idx="0">
+            <a:schemeClr val="accent1"/>
+          </a:effectRef>
+          <a:fontRef idx="minor">
+            <a:schemeClr val="lt1"/>
+          </a:fontRef>
+        </p:style>
+      </p:sp>
+      <p:sp>
+        <p:nvSpPr>
+          <p:cNvPr id="7" name="Date Placeholder 6"/>
           <p:cNvSpPr>
             <a:spLocks noGrp="1"/>
           </p:cNvSpPr>
@@ -3843,7 +4016,7 @@
           <a:p>
             <a:fld id="{F6C21922-584C-4088-ADC5-7905BF8E69C9}" type="datetimeFigureOut">
               <a:rPr lang="en-US" smtClean="0"/>
-              <a:t>8/31/2026</a:t>
+              <a:t>9/14/2026</a:t>
             </a:fld>
             <a:endParaRPr lang="en-US"/>
           </a:p>
@@ -3851,13 +4024,7 @@
       </p:sp>
       <p:sp>
         <p:nvSpPr>
-          <p:cNvPr id="3" name="Fußzeilenplatzhalter 2">
-            <a:extLst>
-              <a:ext uri="{FF2B5EF4-FFF2-40B4-BE49-F238E27FC236}">
-                <a16:creationId xmlns:a16="http://schemas.microsoft.com/office/drawing/2014/main" id="{BAB62B63-0170-4D42-9078-91C2EA307ACC}"/>
-              </a:ext>
-            </a:extLst>
-          </p:cNvPr>
+          <p:cNvPr id="8" name="Footer Placeholder 7"/>
           <p:cNvSpPr>
             <a:spLocks noGrp="1"/>
           </p:cNvSpPr>
@@ -3868,7 +4035,15 @@
         <p:spPr/>
         <p:txBody>
           <a:bodyPr/>
-          <a:lstStyle/>
+          <a:lstStyle>
+            <a:lvl1pPr>
+              <a:defRPr>
+                <a:solidFill>
+                  <a:srgbClr val="FFFFFF"/>
+                </a:solidFill>
+              </a:defRPr>
+            </a:lvl1pPr>
+          </a:lstStyle>
           <a:p>
             <a:endParaRPr lang="en-US"/>
           </a:p>
@@ -3876,13 +4051,7 @@
       </p:sp>
       <p:sp>
         <p:nvSpPr>
-          <p:cNvPr id="4" name="Foliennummernplatzhalter 3">
-            <a:extLst>
-              <a:ext uri="{FF2B5EF4-FFF2-40B4-BE49-F238E27FC236}">
-                <a16:creationId xmlns:a16="http://schemas.microsoft.com/office/drawing/2014/main" id="{73D75694-587A-4E3C-959A-CCE49419D174}"/>
-              </a:ext>
-            </a:extLst>
-          </p:cNvPr>
+          <p:cNvPr id="9" name="Slide Number Placeholder 8"/>
           <p:cNvSpPr>
             <a:spLocks noGrp="1"/>
           </p:cNvSpPr>
@@ -3906,7 +4075,7 @@
     </p:spTree>
     <p:extLst>
       <p:ext uri="{BB962C8B-B14F-4D97-AF65-F5344CB8AC3E}">
-        <p14:creationId xmlns:p14="http://schemas.microsoft.com/office/powerpoint/2010/main" val="1304276727"/>
+        <p14:creationId xmlns:p14="http://schemas.microsoft.com/office/powerpoint/2010/main" val="2714969660"/>
       </p:ext>
     </p:extLst>
   </p:cSld>
@@ -3917,7 +4086,7 @@
 </file>
 
 <file path=ppt/slideLayouts/slideLayout8.xml><?xml version="1.0" encoding="utf-8"?>
-<p:sldLayout xmlns:a="http://schemas.openxmlformats.org/drawingml/2006/main" xmlns:r="http://schemas.openxmlformats.org/officeDocument/2006/relationships" xmlns:p="http://schemas.openxmlformats.org/presentationml/2006/main" type="objTx" preserve="1">
+<p:sldLayout xmlns:a="http://schemas.openxmlformats.org/drawingml/2006/main" xmlns:r="http://schemas.openxmlformats.org/officeDocument/2006/relationships" xmlns:p="http://schemas.openxmlformats.org/presentationml/2006/main" showMasterSp="0" type="objTx" preserve="1">
   <p:cSld name="Inhalt mit Überschrift">
     <p:spTree>
       <p:nvGrpSpPr>
@@ -3935,13 +4104,83 @@
       </p:grpSpPr>
       <p:sp>
         <p:nvSpPr>
-          <p:cNvPr id="2" name="Titel 1">
-            <a:extLst>
-              <a:ext uri="{FF2B5EF4-FFF2-40B4-BE49-F238E27FC236}">
-                <a16:creationId xmlns:a16="http://schemas.microsoft.com/office/drawing/2014/main" id="{59CA8E27-9F7B-496A-A0BE-E488090EB2EC}"/>
-              </a:ext>
-            </a:extLst>
-          </p:cNvPr>
+          <p:cNvPr id="8" name="Rectangle 7"/>
+          <p:cNvSpPr/>
+          <p:nvPr/>
+        </p:nvSpPr>
+        <p:spPr>
+          <a:xfrm>
+            <a:off x="16" y="0"/>
+            <a:ext cx="4050791" cy="6858000"/>
+          </a:xfrm>
+          <a:prstGeom prst="rect">
+            <a:avLst/>
+          </a:prstGeom>
+          <a:solidFill>
+            <a:schemeClr val="accent2"/>
+          </a:solidFill>
+          <a:ln>
+            <a:noFill/>
+          </a:ln>
+        </p:spPr>
+        <p:style>
+          <a:lnRef idx="2">
+            <a:schemeClr val="accent1">
+              <a:shade val="50000"/>
+            </a:schemeClr>
+          </a:lnRef>
+          <a:fillRef idx="1">
+            <a:schemeClr val="accent1"/>
+          </a:fillRef>
+          <a:effectRef idx="0">
+            <a:schemeClr val="accent1"/>
+          </a:effectRef>
+          <a:fontRef idx="minor">
+            <a:schemeClr val="lt1"/>
+          </a:fontRef>
+        </p:style>
+      </p:sp>
+      <p:sp>
+        <p:nvSpPr>
+          <p:cNvPr id="9" name="Rectangle 8"/>
+          <p:cNvSpPr/>
+          <p:nvPr/>
+        </p:nvSpPr>
+        <p:spPr>
+          <a:xfrm>
+            <a:off x="4040071" y="0"/>
+            <a:ext cx="64008" cy="6858000"/>
+          </a:xfrm>
+          <a:prstGeom prst="rect">
+            <a:avLst/>
+          </a:prstGeom>
+          <a:solidFill>
+            <a:schemeClr val="accent1"/>
+          </a:solidFill>
+          <a:ln>
+            <a:noFill/>
+          </a:ln>
+        </p:spPr>
+        <p:style>
+          <a:lnRef idx="2">
+            <a:schemeClr val="accent1">
+              <a:shade val="50000"/>
+            </a:schemeClr>
+          </a:lnRef>
+          <a:fillRef idx="1">
+            <a:schemeClr val="accent1"/>
+          </a:fillRef>
+          <a:effectRef idx="0">
+            <a:schemeClr val="accent1"/>
+          </a:effectRef>
+          <a:fontRef idx="minor">
+            <a:schemeClr val="lt1"/>
+          </a:fontRef>
+        </p:style>
+      </p:sp>
+      <p:sp>
+        <p:nvSpPr>
+          <p:cNvPr id="2" name="Title 1"/>
           <p:cNvSpPr>
             <a:spLocks noGrp="1"/>
           </p:cNvSpPr>
@@ -3951,15 +4190,21 @@
         </p:nvSpPr>
         <p:spPr>
           <a:xfrm>
-            <a:off x="839788" y="457200"/>
-            <a:ext cx="3932237" cy="1600200"/>
+            <a:off x="457200" y="594359"/>
+            <a:ext cx="3200400" cy="2286000"/>
           </a:xfrm>
         </p:spPr>
         <p:txBody>
-          <a:bodyPr anchor="b"/>
+          <a:bodyPr anchor="b">
+            <a:normAutofit/>
+          </a:bodyPr>
           <a:lstStyle>
             <a:lvl1pPr>
-              <a:defRPr sz="3200"/>
+              <a:defRPr sz="3600" b="0">
+                <a:solidFill>
+                  <a:srgbClr val="FFFFFF"/>
+                </a:solidFill>
+              </a:defRPr>
             </a:lvl1pPr>
           </a:lstStyle>
           <a:p>
@@ -3967,19 +4212,13 @@
               <a:rPr lang="de-DE"/>
               <a:t>Mastertitelformat bearbeiten</a:t>
             </a:r>
-            <a:endParaRPr lang="en-US"/>
+            <a:endParaRPr lang="en-US" dirty="0"/>
           </a:p>
         </p:txBody>
       </p:sp>
       <p:sp>
         <p:nvSpPr>
-          <p:cNvPr id="3" name="Inhaltsplatzhalter 2">
-            <a:extLst>
-              <a:ext uri="{FF2B5EF4-FFF2-40B4-BE49-F238E27FC236}">
-                <a16:creationId xmlns:a16="http://schemas.microsoft.com/office/drawing/2014/main" id="{F4BB7254-8E5A-4C22-A85C-62A0A0CE4577}"/>
-              </a:ext>
-            </a:extLst>
-          </p:cNvPr>
+          <p:cNvPr id="3" name="Content Placeholder 2"/>
           <p:cNvSpPr>
             <a:spLocks noGrp="1"/>
           </p:cNvSpPr>
@@ -3989,41 +4228,13 @@
         </p:nvSpPr>
         <p:spPr>
           <a:xfrm>
-            <a:off x="5183188" y="987425"/>
-            <a:ext cx="6172200" cy="4873625"/>
+            <a:off x="4800600" y="731520"/>
+            <a:ext cx="6492240" cy="5257800"/>
           </a:xfrm>
         </p:spPr>
         <p:txBody>
           <a:bodyPr/>
-          <a:lstStyle>
-            <a:lvl1pPr>
-              <a:defRPr sz="3200"/>
-            </a:lvl1pPr>
-            <a:lvl2pPr>
-              <a:defRPr sz="2800"/>
-            </a:lvl2pPr>
-            <a:lvl3pPr>
-              <a:defRPr sz="2400"/>
-            </a:lvl3pPr>
-            <a:lvl4pPr>
-              <a:defRPr sz="2000"/>
-            </a:lvl4pPr>
-            <a:lvl5pPr>
-              <a:defRPr sz="2000"/>
-            </a:lvl5pPr>
-            <a:lvl6pPr>
-              <a:defRPr sz="2000"/>
-            </a:lvl6pPr>
-            <a:lvl7pPr>
-              <a:defRPr sz="2000"/>
-            </a:lvl7pPr>
-            <a:lvl8pPr>
-              <a:defRPr sz="2000"/>
-            </a:lvl8pPr>
-            <a:lvl9pPr>
-              <a:defRPr sz="2000"/>
-            </a:lvl9pPr>
-          </a:lstStyle>
+          <a:lstStyle/>
           <a:p>
             <a:pPr lvl="0"/>
             <a:r>
@@ -4058,19 +4269,13 @@
               <a:rPr lang="de-DE"/>
               <a:t>Fünfte Ebene</a:t>
             </a:r>
-            <a:endParaRPr lang="en-US"/>
+            <a:endParaRPr lang="en-US" dirty="0"/>
           </a:p>
         </p:txBody>
       </p:sp>
       <p:sp>
         <p:nvSpPr>
-          <p:cNvPr id="4" name="Textplatzhalter 3">
-            <a:extLst>
-              <a:ext uri="{FF2B5EF4-FFF2-40B4-BE49-F238E27FC236}">
-                <a16:creationId xmlns:a16="http://schemas.microsoft.com/office/drawing/2014/main" id="{9C497998-BCC9-46E3-8472-0465A70BC9E6}"/>
-              </a:ext>
-            </a:extLst>
-          </p:cNvPr>
+          <p:cNvPr id="4" name="Text Placeholder 3"/>
           <p:cNvSpPr>
             <a:spLocks noGrp="1"/>
           </p:cNvSpPr>
@@ -4080,48 +4285,54 @@
         </p:nvSpPr>
         <p:spPr>
           <a:xfrm>
-            <a:off x="839788" y="2057400"/>
-            <a:ext cx="3932237" cy="3811588"/>
+            <a:off x="457200" y="2926080"/>
+            <a:ext cx="3200400" cy="3379124"/>
           </a:xfrm>
         </p:spPr>
         <p:txBody>
-          <a:bodyPr/>
+          <a:bodyPr lIns="91440" rIns="91440">
+            <a:normAutofit/>
+          </a:bodyPr>
           <a:lstStyle>
             <a:lvl1pPr marL="0" indent="0">
               <a:buNone/>
-              <a:defRPr sz="1600"/>
+              <a:defRPr sz="1500">
+                <a:solidFill>
+                  <a:srgbClr val="FFFFFF"/>
+                </a:solidFill>
+              </a:defRPr>
             </a:lvl1pPr>
             <a:lvl2pPr marL="457200" indent="0">
               <a:buNone/>
-              <a:defRPr sz="1400"/>
+              <a:defRPr sz="1200"/>
             </a:lvl2pPr>
             <a:lvl3pPr marL="914400" indent="0">
               <a:buNone/>
-              <a:defRPr sz="1200"/>
+              <a:defRPr sz="1000"/>
             </a:lvl3pPr>
             <a:lvl4pPr marL="1371600" indent="0">
               <a:buNone/>
-              <a:defRPr sz="1000"/>
+              <a:defRPr sz="900"/>
             </a:lvl4pPr>
             <a:lvl5pPr marL="1828800" indent="0">
               <a:buNone/>
-              <a:defRPr sz="1000"/>
+              <a:defRPr sz="900"/>
             </a:lvl5pPr>
             <a:lvl6pPr marL="2286000" indent="0">
               <a:buNone/>
-              <a:defRPr sz="1000"/>
+              <a:defRPr sz="900"/>
             </a:lvl6pPr>
             <a:lvl7pPr marL="2743200" indent="0">
               <a:buNone/>
-              <a:defRPr sz="1000"/>
+              <a:defRPr sz="900"/>
             </a:lvl7pPr>
             <a:lvl8pPr marL="3200400" indent="0">
               <a:buNone/>
-              <a:defRPr sz="1000"/>
+              <a:defRPr sz="900"/>
             </a:lvl8pPr>
             <a:lvl9pPr marL="3657600" indent="0">
               <a:buNone/>
-              <a:defRPr sz="1000"/>
+              <a:defRPr sz="900"/>
             </a:lvl9pPr>
           </a:lstStyle>
           <a:p>
@@ -4135,13 +4346,7 @@
       </p:sp>
       <p:sp>
         <p:nvSpPr>
-          <p:cNvPr id="5" name="Datumsplatzhalter 4">
-            <a:extLst>
-              <a:ext uri="{FF2B5EF4-FFF2-40B4-BE49-F238E27FC236}">
-                <a16:creationId xmlns:a16="http://schemas.microsoft.com/office/drawing/2014/main" id="{C0E0B8E8-658E-4749-B90C-902450CF347E}"/>
-              </a:ext>
-            </a:extLst>
-          </p:cNvPr>
+          <p:cNvPr id="5" name="Date Placeholder 4"/>
           <p:cNvSpPr>
             <a:spLocks noGrp="1"/>
           </p:cNvSpPr>
@@ -4149,14 +4354,23 @@
             <p:ph type="dt" sz="half" idx="10"/>
           </p:nvPr>
         </p:nvSpPr>
-        <p:spPr/>
+        <p:spPr>
+          <a:xfrm>
+            <a:off x="465512" y="6459785"/>
+            <a:ext cx="2618510" cy="365125"/>
+          </a:xfrm>
+        </p:spPr>
         <p:txBody>
           <a:bodyPr/>
-          <a:lstStyle/>
+          <a:lstStyle>
+            <a:lvl1pPr algn="l">
+              <a:defRPr/>
+            </a:lvl1pPr>
+          </a:lstStyle>
           <a:p>
             <a:fld id="{F6C21922-584C-4088-ADC5-7905BF8E69C9}" type="datetimeFigureOut">
               <a:rPr lang="en-US" smtClean="0"/>
-              <a:t>8/31/2026</a:t>
+              <a:t>9/14/2026</a:t>
             </a:fld>
             <a:endParaRPr lang="en-US"/>
           </a:p>
@@ -4164,13 +4378,7 @@
       </p:sp>
       <p:sp>
         <p:nvSpPr>
-          <p:cNvPr id="6" name="Fußzeilenplatzhalter 5">
-            <a:extLst>
-              <a:ext uri="{FF2B5EF4-FFF2-40B4-BE49-F238E27FC236}">
-                <a16:creationId xmlns:a16="http://schemas.microsoft.com/office/drawing/2014/main" id="{DAB87D3A-64DF-4460-9665-E949D14BE7E3}"/>
-              </a:ext>
-            </a:extLst>
-          </p:cNvPr>
+          <p:cNvPr id="6" name="Footer Placeholder 5"/>
           <p:cNvSpPr>
             <a:spLocks noGrp="1"/>
           </p:cNvSpPr>
@@ -4178,10 +4386,23 @@
             <p:ph type="ftr" sz="quarter" idx="11"/>
           </p:nvPr>
         </p:nvSpPr>
-        <p:spPr/>
+        <p:spPr>
+          <a:xfrm>
+            <a:off x="4800600" y="6459785"/>
+            <a:ext cx="4648200" cy="365125"/>
+          </a:xfrm>
+        </p:spPr>
         <p:txBody>
           <a:bodyPr/>
-          <a:lstStyle/>
+          <a:lstStyle>
+            <a:lvl1pPr algn="l">
+              <a:defRPr>
+                <a:solidFill>
+                  <a:schemeClr val="tx2"/>
+                </a:solidFill>
+              </a:defRPr>
+            </a:lvl1pPr>
+          </a:lstStyle>
           <a:p>
             <a:endParaRPr lang="en-US"/>
           </a:p>
@@ -4189,13 +4410,7 @@
       </p:sp>
       <p:sp>
         <p:nvSpPr>
-          <p:cNvPr id="7" name="Foliennummernplatzhalter 6">
-            <a:extLst>
-              <a:ext uri="{FF2B5EF4-FFF2-40B4-BE49-F238E27FC236}">
-                <a16:creationId xmlns:a16="http://schemas.microsoft.com/office/drawing/2014/main" id="{D40884FC-6506-47B8-A3AA-0DE8093FDA78}"/>
-              </a:ext>
-            </a:extLst>
-          </p:cNvPr>
+          <p:cNvPr id="7" name="Slide Number Placeholder 6"/>
           <p:cNvSpPr>
             <a:spLocks noGrp="1"/>
           </p:cNvSpPr>
@@ -4206,7 +4421,15 @@
         <p:spPr/>
         <p:txBody>
           <a:bodyPr/>
-          <a:lstStyle/>
+          <a:lstStyle>
+            <a:lvl1pPr>
+              <a:defRPr>
+                <a:solidFill>
+                  <a:schemeClr val="tx2"/>
+                </a:solidFill>
+              </a:defRPr>
+            </a:lvl1pPr>
+          </a:lstStyle>
           <a:p>
             <a:fld id="{3D5B5AE7-5E9D-4D00-B2AD-88C850671C57}" type="slidenum">
               <a:rPr lang="en-US" smtClean="0"/>
@@ -4219,7 +4442,7 @@
     </p:spTree>
     <p:extLst>
       <p:ext uri="{BB962C8B-B14F-4D97-AF65-F5344CB8AC3E}">
-        <p14:creationId xmlns:p14="http://schemas.microsoft.com/office/powerpoint/2010/main" val="3814005047"/>
+        <p14:creationId xmlns:p14="http://schemas.microsoft.com/office/powerpoint/2010/main" val="3258483981"/>
       </p:ext>
     </p:extLst>
   </p:cSld>
@@ -4230,7 +4453,7 @@
 </file>
 
 <file path=ppt/slideLayouts/slideLayout9.xml><?xml version="1.0" encoding="utf-8"?>
-<p:sldLayout xmlns:a="http://schemas.openxmlformats.org/drawingml/2006/main" xmlns:r="http://schemas.openxmlformats.org/officeDocument/2006/relationships" xmlns:p="http://schemas.openxmlformats.org/presentationml/2006/main" type="picTx" preserve="1">
+<p:sldLayout xmlns:a="http://schemas.openxmlformats.org/drawingml/2006/main" xmlns:r="http://schemas.openxmlformats.org/officeDocument/2006/relationships" xmlns:p="http://schemas.openxmlformats.org/presentationml/2006/main" showMasterSp="0" type="picTx" preserve="1">
   <p:cSld name="Bild mit Überschrift">
     <p:spTree>
       <p:nvGrpSpPr>
@@ -4248,13 +4471,83 @@
       </p:grpSpPr>
       <p:sp>
         <p:nvSpPr>
-          <p:cNvPr id="2" name="Titel 1">
-            <a:extLst>
-              <a:ext uri="{FF2B5EF4-FFF2-40B4-BE49-F238E27FC236}">
-                <a16:creationId xmlns:a16="http://schemas.microsoft.com/office/drawing/2014/main" id="{11980BE1-244D-4E9F-A558-AB190418D45B}"/>
-              </a:ext>
-            </a:extLst>
-          </p:cNvPr>
+          <p:cNvPr id="8" name="Rectangle 7"/>
+          <p:cNvSpPr/>
+          <p:nvPr/>
+        </p:nvSpPr>
+        <p:spPr>
+          <a:xfrm>
+            <a:off x="0" y="4953000"/>
+            <a:ext cx="12188825" cy="1905000"/>
+          </a:xfrm>
+          <a:prstGeom prst="rect">
+            <a:avLst/>
+          </a:prstGeom>
+          <a:solidFill>
+            <a:schemeClr val="accent2"/>
+          </a:solidFill>
+          <a:ln>
+            <a:noFill/>
+          </a:ln>
+        </p:spPr>
+        <p:style>
+          <a:lnRef idx="2">
+            <a:schemeClr val="accent1">
+              <a:shade val="50000"/>
+            </a:schemeClr>
+          </a:lnRef>
+          <a:fillRef idx="1">
+            <a:schemeClr val="accent1"/>
+          </a:fillRef>
+          <a:effectRef idx="0">
+            <a:schemeClr val="accent1"/>
+          </a:effectRef>
+          <a:fontRef idx="minor">
+            <a:schemeClr val="lt1"/>
+          </a:fontRef>
+        </p:style>
+      </p:sp>
+      <p:sp>
+        <p:nvSpPr>
+          <p:cNvPr id="9" name="Rectangle 8"/>
+          <p:cNvSpPr/>
+          <p:nvPr/>
+        </p:nvSpPr>
+        <p:spPr>
+          <a:xfrm>
+            <a:off x="15" y="4915076"/>
+            <a:ext cx="12188825" cy="64008"/>
+          </a:xfrm>
+          <a:prstGeom prst="rect">
+            <a:avLst/>
+          </a:prstGeom>
+          <a:solidFill>
+            <a:schemeClr val="accent1"/>
+          </a:solidFill>
+          <a:ln>
+            <a:noFill/>
+          </a:ln>
+        </p:spPr>
+        <p:style>
+          <a:lnRef idx="2">
+            <a:schemeClr val="accent1">
+              <a:shade val="50000"/>
+            </a:schemeClr>
+          </a:lnRef>
+          <a:fillRef idx="1">
+            <a:schemeClr val="accent1"/>
+          </a:fillRef>
+          <a:effectRef idx="0">
+            <a:schemeClr val="accent1"/>
+          </a:effectRef>
+          <a:fontRef idx="minor">
+            <a:schemeClr val="lt1"/>
+          </a:fontRef>
+        </p:style>
+      </p:sp>
+      <p:sp>
+        <p:nvSpPr>
+          <p:cNvPr id="2" name="Title 1"/>
           <p:cNvSpPr>
             <a:spLocks noGrp="1"/>
           </p:cNvSpPr>
@@ -4264,15 +4557,21 @@
         </p:nvSpPr>
         <p:spPr>
           <a:xfrm>
-            <a:off x="839788" y="457200"/>
-            <a:ext cx="3932237" cy="1600200"/>
+            <a:off x="1097280" y="5074920"/>
+            <a:ext cx="10113645" cy="822960"/>
           </a:xfrm>
         </p:spPr>
         <p:txBody>
-          <a:bodyPr anchor="b"/>
+          <a:bodyPr lIns="91440" tIns="0" rIns="91440" bIns="0" anchor="b">
+            <a:noAutofit/>
+          </a:bodyPr>
           <a:lstStyle>
             <a:lvl1pPr>
-              <a:defRPr sz="3200"/>
+              <a:defRPr sz="3600" b="0">
+                <a:solidFill>
+                  <a:srgbClr val="FFFFFF"/>
+                </a:solidFill>
+              </a:defRPr>
             </a:lvl1pPr>
           </a:lstStyle>
           <a:p>
@@ -4280,21 +4579,15 @@
               <a:rPr lang="de-DE"/>
               <a:t>Mastertitelformat bearbeiten</a:t>
             </a:r>
-            <a:endParaRPr lang="en-US"/>
+            <a:endParaRPr lang="en-US" dirty="0"/>
           </a:p>
         </p:txBody>
       </p:sp>
       <p:sp>
         <p:nvSpPr>
-          <p:cNvPr id="3" name="Bildplatzhalter 2">
-            <a:extLst>
-              <a:ext uri="{FF2B5EF4-FFF2-40B4-BE49-F238E27FC236}">
-                <a16:creationId xmlns:a16="http://schemas.microsoft.com/office/drawing/2014/main" id="{14693FEE-3ADB-41A2-8111-1BE02A809F6A}"/>
-              </a:ext>
-            </a:extLst>
-          </p:cNvPr>
+          <p:cNvPr id="3" name="Picture Placeholder 2"/>
           <p:cNvSpPr>
-            <a:spLocks noGrp="1"/>
+            <a:spLocks noGrp="1" noChangeAspect="1"/>
           </p:cNvSpPr>
           <p:nvPr>
             <p:ph type="pic" idx="1"/>
@@ -4302,12 +4595,17 @@
         </p:nvSpPr>
         <p:spPr>
           <a:xfrm>
-            <a:off x="5183188" y="987425"/>
-            <a:ext cx="6172200" cy="4873625"/>
+            <a:off x="15" y="0"/>
+            <a:ext cx="12191985" cy="4915076"/>
           </a:xfrm>
+          <a:solidFill>
+            <a:schemeClr val="bg2">
+              <a:lumMod val="90000"/>
+            </a:schemeClr>
+          </a:solidFill>
         </p:spPr>
         <p:txBody>
-          <a:bodyPr/>
+          <a:bodyPr lIns="457200" tIns="457200" anchor="t"/>
           <a:lstStyle>
             <a:lvl1pPr marL="0" indent="0">
               <a:buNone/>
@@ -4347,19 +4645,17 @@
             </a:lvl9pPr>
           </a:lstStyle>
           <a:p>
-            <a:endParaRPr lang="en-US"/>
+            <a:r>
+              <a:rPr lang="de-DE"/>
+              <a:t>Bild durch Klicken auf Symbol hinzufügen</a:t>
+            </a:r>
+            <a:endParaRPr lang="en-US" dirty="0"/>
           </a:p>
         </p:txBody>
       </p:sp>
       <p:sp>
         <p:nvSpPr>
-          <p:cNvPr id="4" name="Textplatzhalter 3">
-            <a:extLst>
-              <a:ext uri="{FF2B5EF4-FFF2-40B4-BE49-F238E27FC236}">
-                <a16:creationId xmlns:a16="http://schemas.microsoft.com/office/drawing/2014/main" id="{1719E3CB-30D8-46CC-B80F-835C71AA41FD}"/>
-              </a:ext>
-            </a:extLst>
-          </p:cNvPr>
+          <p:cNvPr id="4" name="Text Placeholder 3"/>
           <p:cNvSpPr>
             <a:spLocks noGrp="1"/>
           </p:cNvSpPr>
@@ -4369,48 +4665,60 @@
         </p:nvSpPr>
         <p:spPr>
           <a:xfrm>
-            <a:off x="839788" y="2057400"/>
-            <a:ext cx="3932237" cy="3811588"/>
+            <a:off x="1097280" y="5907024"/>
+            <a:ext cx="10113264" cy="594360"/>
           </a:xfrm>
         </p:spPr>
         <p:txBody>
-          <a:bodyPr/>
+          <a:bodyPr lIns="91440" tIns="0" rIns="91440" bIns="0">
+            <a:normAutofit/>
+          </a:bodyPr>
           <a:lstStyle>
             <a:lvl1pPr marL="0" indent="0">
+              <a:spcBef>
+                <a:spcPts val="0"/>
+              </a:spcBef>
+              <a:spcAft>
+                <a:spcPts val="600"/>
+              </a:spcAft>
               <a:buNone/>
-              <a:defRPr sz="1600"/>
+              <a:defRPr sz="1500">
+                <a:solidFill>
+                  <a:srgbClr val="FFFFFF"/>
+                </a:solidFill>
+              </a:defRPr>
             </a:lvl1pPr>
             <a:lvl2pPr marL="457200" indent="0">
               <a:buNone/>
-              <a:defRPr sz="1400"/>
+              <a:defRPr sz="1200"/>
             </a:lvl2pPr>
             <a:lvl3pPr marL="914400" indent="0">
               <a:buNone/>
-              <a:defRPr sz="1200"/>
+              <a:defRPr sz="1000"/>
             </a:lvl3pPr>
             <a:lvl4pPr marL="1371600" indent="0">
               <a:buNone/>
-              <a:defRPr sz="1000"/>
+              <a:defRPr sz="900"/>
             </a:lvl4pPr>
             <a:lvl5pPr marL="1828800" indent="0">
               <a:buNone/>
-              <a:defRPr sz="1000"/>
+              <a:defRPr sz="900"/>
             </a:lvl5pPr>
             <a:lvl6pPr marL="2286000" indent="0">
               <a:buNone/>
-              <a:defRPr sz="1000"/>
+              <a:defRPr sz="900"/>
             </a:lvl6pPr>
             <a:lvl7pPr marL="2743200" indent="0">
               <a:buNone/>
-              <a:defRPr sz="1000"/>
+              <a:defRPr sz="900"/>
             </a:lvl7pPr>
             <a:lvl8pPr marL="3200400" indent="0">
               <a:buNone/>
-              <a:defRPr sz="1000"/>
+              <a:defRPr sz="900"/>
             </a:lvl8pPr>
             <a:lvl9pPr marL="3657600" indent="0">
               <a:buNone/>
-              <a:defRPr sz="1000"/>
+              <a:defRPr sz="900"/>
             </a:lvl9pPr>
           </a:lstStyle>
           <a:p>
@@ -4424,13 +4732,7 @@
       </p:sp>
       <p:sp>
         <p:nvSpPr>
-          <p:cNvPr id="5" name="Datumsplatzhalter 4">
-            <a:extLst>
-              <a:ext uri="{FF2B5EF4-FFF2-40B4-BE49-F238E27FC236}">
-                <a16:creationId xmlns:a16="http://schemas.microsoft.com/office/drawing/2014/main" id="{E72F3F73-411E-485E-B385-DF76C11B5F17}"/>
-              </a:ext>
-            </a:extLst>
-          </p:cNvPr>
+          <p:cNvPr id="5" name="Date Placeholder 4"/>
           <p:cNvSpPr>
             <a:spLocks noGrp="1"/>
           </p:cNvSpPr>
@@ -4445,7 +4747,7 @@
           <a:p>
             <a:fld id="{F6C21922-584C-4088-ADC5-7905BF8E69C9}" type="datetimeFigureOut">
               <a:rPr lang="en-US" smtClean="0"/>
-              <a:t>8/31/2026</a:t>
+              <a:t>9/14/2026</a:t>
             </a:fld>
             <a:endParaRPr lang="en-US"/>
           </a:p>
@@ -4453,13 +4755,7 @@
       </p:sp>
       <p:sp>
         <p:nvSpPr>
-          <p:cNvPr id="6" name="Fußzeilenplatzhalter 5">
-            <a:extLst>
-              <a:ext uri="{FF2B5EF4-FFF2-40B4-BE49-F238E27FC236}">
-                <a16:creationId xmlns:a16="http://schemas.microsoft.com/office/drawing/2014/main" id="{791B121B-575F-4CD0-9036-D41447181175}"/>
-              </a:ext>
-            </a:extLst>
-          </p:cNvPr>
+          <p:cNvPr id="6" name="Footer Placeholder 5"/>
           <p:cNvSpPr>
             <a:spLocks noGrp="1"/>
           </p:cNvSpPr>
@@ -4478,13 +4774,7 @@
       </p:sp>
       <p:sp>
         <p:nvSpPr>
-          <p:cNvPr id="7" name="Foliennummernplatzhalter 6">
-            <a:extLst>
-              <a:ext uri="{FF2B5EF4-FFF2-40B4-BE49-F238E27FC236}">
-                <a16:creationId xmlns:a16="http://schemas.microsoft.com/office/drawing/2014/main" id="{26C5C8F6-F4D8-41B9-A207-1E4076F786D5}"/>
-              </a:ext>
-            </a:extLst>
-          </p:cNvPr>
+          <p:cNvPr id="7" name="Slide Number Placeholder 6"/>
           <p:cNvSpPr>
             <a:spLocks noGrp="1"/>
           </p:cNvSpPr>
@@ -4508,7 +4798,7 @@
     </p:spTree>
     <p:extLst>
       <p:ext uri="{BB962C8B-B14F-4D97-AF65-F5344CB8AC3E}">
-        <p14:creationId xmlns:p14="http://schemas.microsoft.com/office/powerpoint/2010/main" val="379711999"/>
+        <p14:creationId xmlns:p14="http://schemas.microsoft.com/office/powerpoint/2010/main" val="3736095584"/>
       </p:ext>
     </p:extLst>
   </p:cSld>
@@ -4542,13 +4832,83 @@
       </p:grpSpPr>
       <p:sp>
         <p:nvSpPr>
-          <p:cNvPr id="2" name="Titelplatzhalter 1">
-            <a:extLst>
-              <a:ext uri="{FF2B5EF4-FFF2-40B4-BE49-F238E27FC236}">
-                <a16:creationId xmlns:a16="http://schemas.microsoft.com/office/drawing/2014/main" id="{4B7D644B-0F57-48CC-9F6D-5D13C48142FF}"/>
-              </a:ext>
-            </a:extLst>
-          </p:cNvPr>
+          <p:cNvPr id="7" name="Rectangle 6"/>
+          <p:cNvSpPr/>
+          <p:nvPr/>
+        </p:nvSpPr>
+        <p:spPr>
+          <a:xfrm>
+            <a:off x="1" y="6400800"/>
+            <a:ext cx="12192000" cy="457200"/>
+          </a:xfrm>
+          <a:prstGeom prst="rect">
+            <a:avLst/>
+          </a:prstGeom>
+          <a:solidFill>
+            <a:schemeClr val="accent2"/>
+          </a:solidFill>
+          <a:ln>
+            <a:noFill/>
+          </a:ln>
+        </p:spPr>
+        <p:style>
+          <a:lnRef idx="2">
+            <a:schemeClr val="accent1">
+              <a:shade val="50000"/>
+            </a:schemeClr>
+          </a:lnRef>
+          <a:fillRef idx="1">
+            <a:schemeClr val="accent1"/>
+          </a:fillRef>
+          <a:effectRef idx="0">
+            <a:schemeClr val="accent1"/>
+          </a:effectRef>
+          <a:fontRef idx="minor">
+            <a:schemeClr val="lt1"/>
+          </a:fontRef>
+        </p:style>
+      </p:sp>
+      <p:sp>
+        <p:nvSpPr>
+          <p:cNvPr id="9" name="Rectangle 8"/>
+          <p:cNvSpPr/>
+          <p:nvPr/>
+        </p:nvSpPr>
+        <p:spPr>
+          <a:xfrm>
+            <a:off x="15" y="6334316"/>
+            <a:ext cx="12191985" cy="66484"/>
+          </a:xfrm>
+          <a:prstGeom prst="rect">
+            <a:avLst/>
+          </a:prstGeom>
+          <a:solidFill>
+            <a:schemeClr val="accent1"/>
+          </a:solidFill>
+          <a:ln>
+            <a:noFill/>
+          </a:ln>
+        </p:spPr>
+        <p:style>
+          <a:lnRef idx="2">
+            <a:schemeClr val="accent1">
+              <a:shade val="50000"/>
+            </a:schemeClr>
+          </a:lnRef>
+          <a:fillRef idx="1">
+            <a:schemeClr val="accent1"/>
+          </a:fillRef>
+          <a:effectRef idx="0">
+            <a:schemeClr val="accent1"/>
+          </a:effectRef>
+          <a:fontRef idx="minor">
+            <a:schemeClr val="lt1"/>
+          </a:fontRef>
+        </p:style>
+      </p:sp>
+      <p:sp>
+        <p:nvSpPr>
+          <p:cNvPr id="2" name="Title Placeholder 1"/>
           <p:cNvSpPr>
             <a:spLocks noGrp="1"/>
           </p:cNvSpPr>
@@ -4558,15 +4918,15 @@
         </p:nvSpPr>
         <p:spPr>
           <a:xfrm>
-            <a:off x="838200" y="365125"/>
-            <a:ext cx="10515600" cy="1325563"/>
+            <a:off x="1097280" y="286603"/>
+            <a:ext cx="10058400" cy="1450757"/>
           </a:xfrm>
           <a:prstGeom prst="rect">
             <a:avLst/>
           </a:prstGeom>
         </p:spPr>
         <p:txBody>
-          <a:bodyPr vert="horz" lIns="91440" tIns="45720" rIns="91440" bIns="45720" rtlCol="0" anchor="ctr">
+          <a:bodyPr vert="horz" lIns="91440" tIns="45720" rIns="91440" bIns="45720" rtlCol="0" anchor="b">
             <a:normAutofit/>
           </a:bodyPr>
           <a:lstStyle/>
@@ -4575,19 +4935,13 @@
               <a:rPr lang="de-DE"/>
               <a:t>Mastertitelformat bearbeiten</a:t>
             </a:r>
-            <a:endParaRPr lang="en-US"/>
+            <a:endParaRPr lang="en-US" dirty="0"/>
           </a:p>
         </p:txBody>
       </p:sp>
       <p:sp>
         <p:nvSpPr>
-          <p:cNvPr id="3" name="Textplatzhalter 2">
-            <a:extLst>
-              <a:ext uri="{FF2B5EF4-FFF2-40B4-BE49-F238E27FC236}">
-                <a16:creationId xmlns:a16="http://schemas.microsoft.com/office/drawing/2014/main" id="{CB12BF4A-D196-418E-A2AE-F5DB1B35D310}"/>
-              </a:ext>
-            </a:extLst>
-          </p:cNvPr>
+          <p:cNvPr id="3" name="Text Placeholder 2"/>
           <p:cNvSpPr>
             <a:spLocks noGrp="1"/>
           </p:cNvSpPr>
@@ -4597,15 +4951,15 @@
         </p:nvSpPr>
         <p:spPr>
           <a:xfrm>
-            <a:off x="838200" y="1825625"/>
-            <a:ext cx="10515600" cy="4351338"/>
+            <a:off x="1097280" y="1845734"/>
+            <a:ext cx="10058400" cy="4023360"/>
           </a:xfrm>
           <a:prstGeom prst="rect">
             <a:avLst/>
           </a:prstGeom>
         </p:spPr>
         <p:txBody>
-          <a:bodyPr vert="horz" lIns="91440" tIns="45720" rIns="91440" bIns="45720" rtlCol="0">
+          <a:bodyPr vert="horz" lIns="0" tIns="45720" rIns="0" bIns="45720" rtlCol="0">
             <a:normAutofit/>
           </a:bodyPr>
           <a:lstStyle/>
@@ -4643,19 +4997,13 @@
               <a:rPr lang="de-DE"/>
               <a:t>Fünfte Ebene</a:t>
             </a:r>
-            <a:endParaRPr lang="en-US"/>
+            <a:endParaRPr lang="en-US" dirty="0"/>
           </a:p>
         </p:txBody>
       </p:sp>
       <p:sp>
         <p:nvSpPr>
-          <p:cNvPr id="4" name="Datumsplatzhalter 3">
-            <a:extLst>
-              <a:ext uri="{FF2B5EF4-FFF2-40B4-BE49-F238E27FC236}">
-                <a16:creationId xmlns:a16="http://schemas.microsoft.com/office/drawing/2014/main" id="{83F5C64A-2DED-48E8-A5AB-F35B9EF90158}"/>
-              </a:ext>
-            </a:extLst>
-          </p:cNvPr>
+          <p:cNvPr id="4" name="Date Placeholder 3"/>
           <p:cNvSpPr>
             <a:spLocks noGrp="1"/>
           </p:cNvSpPr>
@@ -4665,8 +5013,8 @@
         </p:nvSpPr>
         <p:spPr>
           <a:xfrm>
-            <a:off x="838200" y="6356350"/>
-            <a:ext cx="2743200" cy="365125"/>
+            <a:off x="1097280" y="6459785"/>
+            <a:ext cx="2472271" cy="365125"/>
           </a:xfrm>
           <a:prstGeom prst="rect">
             <a:avLst/>
@@ -4676,11 +5024,9 @@
           <a:bodyPr vert="horz" lIns="91440" tIns="45720" rIns="91440" bIns="45720" rtlCol="0" anchor="ctr"/>
           <a:lstStyle>
             <a:lvl1pPr algn="l">
-              <a:defRPr sz="1200">
+              <a:defRPr sz="900">
                 <a:solidFill>
-                  <a:schemeClr val="tx1">
-                    <a:tint val="75000"/>
-                  </a:schemeClr>
+                  <a:srgbClr val="FFFFFF"/>
                 </a:solidFill>
               </a:defRPr>
             </a:lvl1pPr>
@@ -4688,7 +5034,7 @@
           <a:p>
             <a:fld id="{F6C21922-584C-4088-ADC5-7905BF8E69C9}" type="datetimeFigureOut">
               <a:rPr lang="en-US" smtClean="0"/>
-              <a:t>8/31/2026</a:t>
+              <a:t>9/14/2026</a:t>
             </a:fld>
             <a:endParaRPr lang="en-US"/>
           </a:p>
@@ -4696,13 +5042,7 @@
       </p:sp>
       <p:sp>
         <p:nvSpPr>
-          <p:cNvPr id="5" name="Fußzeilenplatzhalter 4">
-            <a:extLst>
-              <a:ext uri="{FF2B5EF4-FFF2-40B4-BE49-F238E27FC236}">
-                <a16:creationId xmlns:a16="http://schemas.microsoft.com/office/drawing/2014/main" id="{336AE5C5-B9D4-4A4A-9202-403E50C3816B}"/>
-              </a:ext>
-            </a:extLst>
-          </p:cNvPr>
+          <p:cNvPr id="5" name="Footer Placeholder 4"/>
           <p:cNvSpPr>
             <a:spLocks noGrp="1"/>
           </p:cNvSpPr>
@@ -4712,8 +5052,8 @@
         </p:nvSpPr>
         <p:spPr>
           <a:xfrm>
-            <a:off x="4038600" y="6356350"/>
-            <a:ext cx="4114800" cy="365125"/>
+            <a:off x="3686185" y="6459785"/>
+            <a:ext cx="4822804" cy="365125"/>
           </a:xfrm>
           <a:prstGeom prst="rect">
             <a:avLst/>
@@ -4723,11 +5063,9 @@
           <a:bodyPr vert="horz" lIns="91440" tIns="45720" rIns="91440" bIns="45720" rtlCol="0" anchor="ctr"/>
           <a:lstStyle>
             <a:lvl1pPr algn="ctr">
-              <a:defRPr sz="1200">
+              <a:defRPr sz="900" cap="all" baseline="0">
                 <a:solidFill>
-                  <a:schemeClr val="tx1">
-                    <a:tint val="75000"/>
-                  </a:schemeClr>
+                  <a:srgbClr val="FFFFFF"/>
                 </a:solidFill>
               </a:defRPr>
             </a:lvl1pPr>
@@ -4739,13 +5077,7 @@
       </p:sp>
       <p:sp>
         <p:nvSpPr>
-          <p:cNvPr id="6" name="Foliennummernplatzhalter 5">
-            <a:extLst>
-              <a:ext uri="{FF2B5EF4-FFF2-40B4-BE49-F238E27FC236}">
-                <a16:creationId xmlns:a16="http://schemas.microsoft.com/office/drawing/2014/main" id="{98373FD2-3BFC-4DD2-84C2-619504F3048A}"/>
-              </a:ext>
-            </a:extLst>
-          </p:cNvPr>
+          <p:cNvPr id="6" name="Slide Number Placeholder 5"/>
           <p:cNvSpPr>
             <a:spLocks noGrp="1"/>
           </p:cNvSpPr>
@@ -4755,8 +5087,8 @@
         </p:nvSpPr>
         <p:spPr>
           <a:xfrm>
-            <a:off x="8610600" y="6356350"/>
-            <a:ext cx="2743200" cy="365125"/>
+            <a:off x="9900458" y="6459785"/>
+            <a:ext cx="1312025" cy="365125"/>
           </a:xfrm>
           <a:prstGeom prst="rect">
             <a:avLst/>
@@ -4766,11 +5098,9 @@
           <a:bodyPr vert="horz" lIns="91440" tIns="45720" rIns="91440" bIns="45720" rtlCol="0" anchor="ctr"/>
           <a:lstStyle>
             <a:lvl1pPr algn="r">
-              <a:defRPr sz="1200">
+              <a:defRPr sz="1050">
                 <a:solidFill>
-                  <a:schemeClr val="tx1">
-                    <a:tint val="75000"/>
-                  </a:schemeClr>
+                  <a:srgbClr val="FFFFFF"/>
                 </a:solidFill>
               </a:defRPr>
             </a:lvl1pPr>
@@ -4784,40 +5114,81 @@
           </a:p>
         </p:txBody>
       </p:sp>
+      <p:cxnSp>
+        <p:nvCxnSpPr>
+          <p:cNvPr id="10" name="Straight Connector 9"/>
+          <p:cNvCxnSpPr/>
+          <p:nvPr/>
+        </p:nvCxnSpPr>
+        <p:spPr>
+          <a:xfrm>
+            <a:off x="1193532" y="1737845"/>
+            <a:ext cx="9966960" cy="0"/>
+          </a:xfrm>
+          <a:prstGeom prst="line">
+            <a:avLst/>
+          </a:prstGeom>
+          <a:ln w="6350">
+            <a:solidFill>
+              <a:schemeClr val="tx1">
+                <a:lumMod val="50000"/>
+                <a:lumOff val="50000"/>
+              </a:schemeClr>
+            </a:solidFill>
+          </a:ln>
+        </p:spPr>
+        <p:style>
+          <a:lnRef idx="1">
+            <a:schemeClr val="accent1"/>
+          </a:lnRef>
+          <a:fillRef idx="0">
+            <a:schemeClr val="accent1"/>
+          </a:fillRef>
+          <a:effectRef idx="0">
+            <a:schemeClr val="accent1"/>
+          </a:effectRef>
+          <a:fontRef idx="minor">
+            <a:schemeClr val="tx1"/>
+          </a:fontRef>
+        </p:style>
+      </p:cxnSp>
     </p:spTree>
     <p:extLst>
       <p:ext uri="{BB962C8B-B14F-4D97-AF65-F5344CB8AC3E}">
-        <p14:creationId xmlns:p14="http://schemas.microsoft.com/office/powerpoint/2010/main" val="328543065"/>
+        <p14:creationId xmlns:p14="http://schemas.microsoft.com/office/powerpoint/2010/main" val="2522113687"/>
       </p:ext>
     </p:extLst>
   </p:cSld>
   <p:clrMap bg1="lt1" tx1="dk1" bg2="lt2" tx2="dk2" accent1="accent1" accent2="accent2" accent3="accent3" accent4="accent4" accent5="accent5" accent6="accent6" hlink="hlink" folHlink="folHlink"/>
   <p:sldLayoutIdLst>
-    <p:sldLayoutId id="2147483649" r:id="rId1"/>
-    <p:sldLayoutId id="2147483650" r:id="rId2"/>
-    <p:sldLayoutId id="2147483651" r:id="rId3"/>
-    <p:sldLayoutId id="2147483652" r:id="rId4"/>
-    <p:sldLayoutId id="2147483653" r:id="rId5"/>
-    <p:sldLayoutId id="2147483654" r:id="rId6"/>
-    <p:sldLayoutId id="2147483655" r:id="rId7"/>
-    <p:sldLayoutId id="2147483656" r:id="rId8"/>
-    <p:sldLayoutId id="2147483657" r:id="rId9"/>
-    <p:sldLayoutId id="2147483658" r:id="rId10"/>
-    <p:sldLayoutId id="2147483659" r:id="rId11"/>
+    <p:sldLayoutId id="2147483702" r:id="rId1"/>
+    <p:sldLayoutId id="2147483703" r:id="rId2"/>
+    <p:sldLayoutId id="2147483704" r:id="rId3"/>
+    <p:sldLayoutId id="2147483705" r:id="rId4"/>
+    <p:sldLayoutId id="2147483706" r:id="rId5"/>
+    <p:sldLayoutId id="2147483707" r:id="rId6"/>
+    <p:sldLayoutId id="2147483708" r:id="rId7"/>
+    <p:sldLayoutId id="2147483709" r:id="rId8"/>
+    <p:sldLayoutId id="2147483710" r:id="rId9"/>
+    <p:sldLayoutId id="2147483711" r:id="rId10"/>
+    <p:sldLayoutId id="2147483712" r:id="rId11"/>
   </p:sldLayoutIdLst>
   <p:txStyles>
     <p:titleStyle>
       <a:lvl1pPr algn="l" defTabSz="914400" rtl="0" eaLnBrk="1" latinLnBrk="0" hangingPunct="1">
         <a:lnSpc>
-          <a:spcPct val="90000"/>
+          <a:spcPct val="85000"/>
         </a:lnSpc>
         <a:spcBef>
           <a:spcPct val="0"/>
         </a:spcBef>
         <a:buNone/>
-        <a:defRPr sz="4400" kern="1200">
+        <a:defRPr sz="4800" kern="1200" spc="-50" baseline="0">
           <a:solidFill>
-            <a:schemeClr val="tx1"/>
+            <a:schemeClr val="tx1">
+              <a:lumMod val="75000"/>
+              <a:lumOff val="25000"/>
+            </a:schemeClr>
           </a:solidFill>
           <a:latin typeface="+mj-lt"/>
           <a:ea typeface="+mj-ea"/>
@@ -4826,162 +5197,244 @@
       </a:lvl1pPr>
     </p:titleStyle>
     <p:bodyStyle>
-      <a:lvl1pPr marL="228600" indent="-228600" algn="l" defTabSz="914400" rtl="0" eaLnBrk="1" latinLnBrk="0" hangingPunct="1">
+      <a:lvl1pPr marL="91440" indent="-91440" algn="l" defTabSz="914400" rtl="0" eaLnBrk="1" latinLnBrk="0" hangingPunct="1">
         <a:lnSpc>
           <a:spcPct val="90000"/>
         </a:lnSpc>
         <a:spcBef>
-          <a:spcPts val="1000"/>
+          <a:spcPts val="1200"/>
         </a:spcBef>
-        <a:buFont typeface="Arial" panose="020B0604020202020204" pitchFamily="34" charset="0"/>
-        <a:buChar char="•"/>
-        <a:defRPr sz="2800" kern="1200">
+        <a:spcAft>
+          <a:spcPts val="200"/>
+        </a:spcAft>
+        <a:buClr>
+          <a:schemeClr val="accent1"/>
+        </a:buClr>
+        <a:buSzPct val="100000"/>
+        <a:buFont typeface="Calibri" panose="020F0502020204030204" pitchFamily="34" charset="0"/>
+        <a:buChar char=" "/>
+        <a:defRPr sz="2000" kern="1200">
           <a:solidFill>
-            <a:schemeClr val="tx1"/>
+            <a:schemeClr val="tx1">
+              <a:lumMod val="75000"/>
+              <a:lumOff val="25000"/>
+            </a:schemeClr>
           </a:solidFill>
           <a:latin typeface="+mn-lt"/>
           <a:ea typeface="+mn-ea"/>
           <a:cs typeface="+mn-cs"/>
         </a:defRPr>
       </a:lvl1pPr>
-      <a:lvl2pPr marL="685800" indent="-228600" algn="l" defTabSz="914400" rtl="0" eaLnBrk="1" latinLnBrk="0" hangingPunct="1">
+      <a:lvl2pPr marL="384048" indent="-182880" algn="l" defTabSz="914400" rtl="0" eaLnBrk="1" latinLnBrk="0" hangingPunct="1">
         <a:lnSpc>
           <a:spcPct val="90000"/>
         </a:lnSpc>
         <a:spcBef>
-          <a:spcPts val="500"/>
+          <a:spcPts val="200"/>
         </a:spcBef>
-        <a:buFont typeface="Arial" panose="020B0604020202020204" pitchFamily="34" charset="0"/>
-        <a:buChar char="•"/>
-        <a:defRPr sz="2400" kern="1200">
+        <a:spcAft>
+          <a:spcPts val="400"/>
+        </a:spcAft>
+        <a:buClr>
+          <a:schemeClr val="accent1"/>
+        </a:buClr>
+        <a:buFont typeface="Calibri" pitchFamily="34" charset="0"/>
+        <a:buChar char="◦"/>
+        <a:defRPr sz="1800" kern="1200">
           <a:solidFill>
-            <a:schemeClr val="tx1"/>
+            <a:schemeClr val="tx1">
+              <a:lumMod val="75000"/>
+              <a:lumOff val="25000"/>
+            </a:schemeClr>
           </a:solidFill>
           <a:latin typeface="+mn-lt"/>
           <a:ea typeface="+mn-ea"/>
           <a:cs typeface="+mn-cs"/>
         </a:defRPr>
       </a:lvl2pPr>
-      <a:lvl3pPr marL="1143000" indent="-228600" algn="l" defTabSz="914400" rtl="0" eaLnBrk="1" latinLnBrk="0" hangingPunct="1">
+      <a:lvl3pPr marL="566928" indent="-182880" algn="l" defTabSz="914400" rtl="0" eaLnBrk="1" latinLnBrk="0" hangingPunct="1">
         <a:lnSpc>
           <a:spcPct val="90000"/>
         </a:lnSpc>
         <a:spcBef>
-          <a:spcPts val="500"/>
+          <a:spcPts val="200"/>
         </a:spcBef>
-        <a:buFont typeface="Arial" panose="020B0604020202020204" pitchFamily="34" charset="0"/>
-        <a:buChar char="•"/>
-        <a:defRPr sz="2000" kern="1200">
+        <a:spcAft>
+          <a:spcPts val="400"/>
+        </a:spcAft>
+        <a:buClr>
+          <a:schemeClr val="accent1"/>
+        </a:buClr>
+        <a:buFont typeface="Calibri" pitchFamily="34" charset="0"/>
+        <a:buChar char="◦"/>
+        <a:defRPr sz="1400" kern="1200">
           <a:solidFill>
-            <a:schemeClr val="tx1"/>
+            <a:schemeClr val="tx1">
+              <a:lumMod val="75000"/>
+              <a:lumOff val="25000"/>
+            </a:schemeClr>
           </a:solidFill>
           <a:latin typeface="+mn-lt"/>
           <a:ea typeface="+mn-ea"/>
           <a:cs typeface="+mn-cs"/>
         </a:defRPr>
       </a:lvl3pPr>
-      <a:lvl4pPr marL="1600200" indent="-228600" algn="l" defTabSz="914400" rtl="0" eaLnBrk="1" latinLnBrk="0" hangingPunct="1">
+      <a:lvl4pPr marL="749808" indent="-182880" algn="l" defTabSz="914400" rtl="0" eaLnBrk="1" latinLnBrk="0" hangingPunct="1">
         <a:lnSpc>
           <a:spcPct val="90000"/>
         </a:lnSpc>
         <a:spcBef>
-          <a:spcPts val="500"/>
+          <a:spcPts val="200"/>
         </a:spcBef>
-        <a:buFont typeface="Arial" panose="020B0604020202020204" pitchFamily="34" charset="0"/>
-        <a:buChar char="•"/>
-        <a:defRPr sz="1800" kern="1200">
+        <a:spcAft>
+          <a:spcPts val="400"/>
+        </a:spcAft>
+        <a:buClr>
+          <a:schemeClr val="accent1"/>
+        </a:buClr>
+        <a:buFont typeface="Calibri" pitchFamily="34" charset="0"/>
+        <a:buChar char="◦"/>
+        <a:defRPr sz="1400" kern="1200">
           <a:solidFill>
-            <a:schemeClr val="tx1"/>
+            <a:schemeClr val="tx1">
+              <a:lumMod val="75000"/>
+              <a:lumOff val="25000"/>
+            </a:schemeClr>
           </a:solidFill>
           <a:latin typeface="+mn-lt"/>
           <a:ea typeface="+mn-ea"/>
           <a:cs typeface="+mn-cs"/>
         </a:defRPr>
       </a:lvl4pPr>
-      <a:lvl5pPr marL="2057400" indent="-228600" algn="l" defTabSz="914400" rtl="0" eaLnBrk="1" latinLnBrk="0" hangingPunct="1">
+      <a:lvl5pPr marL="932688" indent="-182880" algn="l" defTabSz="914400" rtl="0" eaLnBrk="1" latinLnBrk="0" hangingPunct="1">
         <a:lnSpc>
           <a:spcPct val="90000"/>
         </a:lnSpc>
         <a:spcBef>
-          <a:spcPts val="500"/>
+          <a:spcPts val="200"/>
         </a:spcBef>
-        <a:buFont typeface="Arial" panose="020B0604020202020204" pitchFamily="34" charset="0"/>
-        <a:buChar char="•"/>
-        <a:defRPr sz="1800" kern="1200">
+        <a:spcAft>
+          <a:spcPts val="400"/>
+        </a:spcAft>
+        <a:buClr>
+          <a:schemeClr val="accent1"/>
+        </a:buClr>
+        <a:buFont typeface="Calibri" pitchFamily="34" charset="0"/>
+        <a:buChar char="◦"/>
+        <a:defRPr sz="1400" kern="1200">
           <a:solidFill>
-            <a:schemeClr val="tx1"/>
+            <a:schemeClr val="tx1">
+              <a:lumMod val="75000"/>
+              <a:lumOff val="25000"/>
+            </a:schemeClr>
           </a:solidFill>
           <a:latin typeface="+mn-lt"/>
           <a:ea typeface="+mn-ea"/>
           <a:cs typeface="+mn-cs"/>
         </a:defRPr>
       </a:lvl5pPr>
-      <a:lvl6pPr marL="2514600" indent="-228600" algn="l" defTabSz="914400" rtl="0" eaLnBrk="1" latinLnBrk="0" hangingPunct="1">
+      <a:lvl6pPr marL="1100000" indent="-228600" algn="l" defTabSz="914400" rtl="0" eaLnBrk="1" latinLnBrk="0" hangingPunct="1">
         <a:lnSpc>
           <a:spcPct val="90000"/>
         </a:lnSpc>
         <a:spcBef>
-          <a:spcPts val="500"/>
+          <a:spcPts val="200"/>
         </a:spcBef>
-        <a:buFont typeface="Arial" panose="020B0604020202020204" pitchFamily="34" charset="0"/>
-        <a:buChar char="•"/>
-        <a:defRPr sz="1800" kern="1200">
+        <a:spcAft>
+          <a:spcPts val="400"/>
+        </a:spcAft>
+        <a:buClr>
+          <a:schemeClr val="accent1"/>
+        </a:buClr>
+        <a:buFont typeface="Calibri" pitchFamily="34" charset="0"/>
+        <a:buChar char="◦"/>
+        <a:defRPr sz="1400" kern="1200">
           <a:solidFill>
-            <a:schemeClr val="tx1"/>
+            <a:schemeClr val="tx1">
+              <a:lumMod val="75000"/>
+              <a:lumOff val="25000"/>
+            </a:schemeClr>
           </a:solidFill>
           <a:latin typeface="+mn-lt"/>
           <a:ea typeface="+mn-ea"/>
           <a:cs typeface="+mn-cs"/>
         </a:defRPr>
       </a:lvl6pPr>
-      <a:lvl7pPr marL="2971800" indent="-228600" algn="l" defTabSz="914400" rtl="0" eaLnBrk="1" latinLnBrk="0" hangingPunct="1">
+      <a:lvl7pPr marL="1300000" indent="-228600" algn="l" defTabSz="914400" rtl="0" eaLnBrk="1" latinLnBrk="0" hangingPunct="1">
         <a:lnSpc>
           <a:spcPct val="90000"/>
         </a:lnSpc>
         <a:spcBef>
-          <a:spcPts val="500"/>
+          <a:spcPts val="200"/>
         </a:spcBef>
-        <a:buFont typeface="Arial" panose="020B0604020202020204" pitchFamily="34" charset="0"/>
-        <a:buChar char="•"/>
-        <a:defRPr sz="1800" kern="1200">
+        <a:spcAft>
+          <a:spcPts val="400"/>
+        </a:spcAft>
+        <a:buClr>
+          <a:schemeClr val="accent1"/>
+        </a:buClr>
+        <a:buFont typeface="Calibri" pitchFamily="34" charset="0"/>
+        <a:buChar char="◦"/>
+        <a:defRPr sz="1400" kern="1200">
           <a:solidFill>
-            <a:schemeClr val="tx1"/>
+            <a:schemeClr val="tx1">
+              <a:lumMod val="75000"/>
+              <a:lumOff val="25000"/>
+            </a:schemeClr>
           </a:solidFill>
           <a:latin typeface="+mn-lt"/>
           <a:ea typeface="+mn-ea"/>
           <a:cs typeface="+mn-cs"/>
         </a:defRPr>
       </a:lvl7pPr>
-      <a:lvl8pPr marL="3429000" indent="-228600" algn="l" defTabSz="914400" rtl="0" eaLnBrk="1" latinLnBrk="0" hangingPunct="1">
+      <a:lvl8pPr marL="1500000" indent="-228600" algn="l" defTabSz="914400" rtl="0" eaLnBrk="1" latinLnBrk="0" hangingPunct="1">
         <a:lnSpc>
           <a:spcPct val="90000"/>
         </a:lnSpc>
         <a:spcBef>
-          <a:spcPts val="500"/>
+          <a:spcPts val="200"/>
         </a:spcBef>
-        <a:buFont typeface="Arial" panose="020B0604020202020204" pitchFamily="34" charset="0"/>
-        <a:buChar char="•"/>
-        <a:defRPr sz="1800" kern="1200">
+        <a:spcAft>
+          <a:spcPts val="400"/>
+        </a:spcAft>
+        <a:buClr>
+          <a:schemeClr val="accent1"/>
+        </a:buClr>
+        <a:buFont typeface="Calibri" pitchFamily="34" charset="0"/>
+        <a:buChar char="◦"/>
+        <a:defRPr sz="1400" kern="1200">
           <a:solidFill>
-            <a:schemeClr val="tx1"/>
+            <a:schemeClr val="tx1">
+              <a:lumMod val="75000"/>
+              <a:lumOff val="25000"/>
+            </a:schemeClr>
           </a:solidFill>
           <a:latin typeface="+mn-lt"/>
           <a:ea typeface="+mn-ea"/>
           <a:cs typeface="+mn-cs"/>
         </a:defRPr>
       </a:lvl8pPr>
-      <a:lvl9pPr marL="3886200" indent="-228600" algn="l" defTabSz="914400" rtl="0" eaLnBrk="1" latinLnBrk="0" hangingPunct="1">
+      <a:lvl9pPr marL="1700000" indent="-228600" algn="l" defTabSz="914400" rtl="0" eaLnBrk="1" latinLnBrk="0" hangingPunct="1">
         <a:lnSpc>
           <a:spcPct val="90000"/>
         </a:lnSpc>
         <a:spcBef>
-          <a:spcPts val="500"/>
+          <a:spcPts val="200"/>
         </a:spcBef>
-        <a:buFont typeface="Arial" panose="020B0604020202020204" pitchFamily="34" charset="0"/>
-        <a:buChar char="•"/>
-        <a:defRPr sz="1800" kern="1200">
+        <a:spcAft>
+          <a:spcPts val="400"/>
+        </a:spcAft>
+        <a:buClr>
+          <a:schemeClr val="accent1"/>
+        </a:buClr>
+        <a:buFont typeface="Calibri" pitchFamily="34" charset="0"/>
+        <a:buChar char="◦"/>
+        <a:defRPr sz="1400" kern="1200">
           <a:solidFill>
-            <a:schemeClr val="tx1"/>
+            <a:schemeClr val="tx1">
+              <a:lumMod val="75000"/>
+              <a:lumOff val="25000"/>
+            </a:schemeClr>
           </a:solidFill>
           <a:latin typeface="+mn-lt"/>
           <a:ea typeface="+mn-ea"/>
@@ -5123,7 +5576,7 @@
         </p:nvSpPr>
         <p:spPr>
           <a:xfrm>
-            <a:off x="1524000" y="762436"/>
+            <a:off x="1523999" y="1710290"/>
             <a:ext cx="9144000" cy="2387600"/>
           </a:xfrm>
         </p:spPr>
@@ -5137,40 +5590,14 @@
             </a:r>
             <a:r>
               <a:rPr lang="en-US" dirty="0"/>
-              <a:t> in Git und GitHub</a:t>
-            </a:r>
-          </a:p>
-        </p:txBody>
-      </p:sp>
-      <p:sp>
-        <p:nvSpPr>
-          <p:cNvPr id="3" name="Untertitel 2">
-            <a:extLst>
-              <a:ext uri="{FF2B5EF4-FFF2-40B4-BE49-F238E27FC236}">
-                <a16:creationId xmlns:a16="http://schemas.microsoft.com/office/drawing/2014/main" id="{6AAD805D-BC8B-4C35-888E-FF6D7FC099CD}"/>
-              </a:ext>
-            </a:extLst>
-          </p:cNvPr>
-          <p:cNvSpPr>
-            <a:spLocks noGrp="1"/>
-          </p:cNvSpPr>
-          <p:nvPr>
-            <p:ph type="subTitle" idx="1"/>
-          </p:nvPr>
-        </p:nvSpPr>
-        <p:spPr>
-          <a:xfrm>
-            <a:off x="1524000" y="3242113"/>
-            <a:ext cx="9144000" cy="1655762"/>
-          </a:xfrm>
-        </p:spPr>
-        <p:txBody>
-          <a:bodyPr/>
-          <a:lstStyle/>
-          <a:p>
-            <a:r>
+              <a:t> in </a:t>
+            </a:r>
+            <a:br>
               <a:rPr lang="en-US" dirty="0"/>
-              <a:t>Workshop Retreat 2026</a:t>
+            </a:br>
+            <a:r>
+              <a:rPr lang="en-US" dirty="0"/>
+              <a:t>Git und GitHub</a:t>
             </a:r>
           </a:p>
         </p:txBody>
@@ -5204,7 +5631,7 @@
         </p:blipFill>
         <p:spPr bwMode="auto">
           <a:xfrm>
-            <a:off x="4646791" y="4196648"/>
+            <a:off x="4646791" y="4469026"/>
             <a:ext cx="2898417" cy="1626538"/>
           </a:xfrm>
           <a:prstGeom prst="rect">
@@ -5222,6 +5649,36 @@
           </a:extLst>
         </p:spPr>
       </p:pic>
+      <p:sp>
+        <p:nvSpPr>
+          <p:cNvPr id="6" name="Untertitel 5">
+            <a:extLst>
+              <a:ext uri="{FF2B5EF4-FFF2-40B4-BE49-F238E27FC236}">
+                <a16:creationId xmlns:a16="http://schemas.microsoft.com/office/drawing/2014/main" id="{ACEBE29A-3D32-43B8-BFE7-0EF37453A32B}"/>
+              </a:ext>
+            </a:extLst>
+          </p:cNvPr>
+          <p:cNvSpPr>
+            <a:spLocks noGrp="1"/>
+          </p:cNvSpPr>
+          <p:nvPr>
+            <p:ph type="subTitle" idx="1"/>
+          </p:nvPr>
+        </p:nvSpPr>
+        <p:spPr>
+          <a:xfrm>
+            <a:off x="1066800" y="4834764"/>
+            <a:ext cx="10058400" cy="1143000"/>
+          </a:xfrm>
+        </p:spPr>
+        <p:txBody>
+          <a:bodyPr/>
+          <a:lstStyle/>
+          <a:p>
+            <a:endParaRPr lang="en-US" dirty="0"/>
+          </a:p>
+        </p:txBody>
+      </p:sp>
     </p:spTree>
     <p:extLst>
       <p:ext uri="{BB962C8B-B14F-4D97-AF65-F5344CB8AC3E}">
@@ -5280,51 +5737,6 @@
           </a:p>
         </p:txBody>
       </p:sp>
-      <p:sp>
-        <p:nvSpPr>
-          <p:cNvPr id="7" name="AutoShape 8" descr="CS400: Git Basic">
-            <a:extLst>
-              <a:ext uri="{FF2B5EF4-FFF2-40B4-BE49-F238E27FC236}">
-                <a16:creationId xmlns:a16="http://schemas.microsoft.com/office/drawing/2014/main" id="{43E4BB96-1EB5-42D8-8A83-F1C8A08925DA}"/>
-              </a:ext>
-            </a:extLst>
-          </p:cNvPr>
-          <p:cNvSpPr>
-            <a:spLocks noChangeAspect="1" noChangeArrowheads="1"/>
-          </p:cNvSpPr>
-          <p:nvPr/>
-        </p:nvSpPr>
-        <p:spPr bwMode="auto">
-          <a:xfrm>
-            <a:off x="5943600" y="3276600"/>
-            <a:ext cx="304800" cy="304800"/>
-          </a:xfrm>
-          <a:prstGeom prst="rect">
-            <a:avLst/>
-          </a:prstGeom>
-          <a:noFill/>
-          <a:extLst>
-            <a:ext uri="{909E8E84-426E-40DD-AFC4-6F175D3DCCD1}">
-              <a14:hiddenFill xmlns:a14="http://schemas.microsoft.com/office/drawing/2010/main">
-                <a:solidFill>
-                  <a:srgbClr val="FFFFFF"/>
-                </a:solidFill>
-              </a14:hiddenFill>
-            </a:ext>
-          </a:extLst>
-        </p:spPr>
-        <p:txBody>
-          <a:bodyPr vert="horz" wrap="square" lIns="91440" tIns="45720" rIns="91440" bIns="45720" numCol="1" anchor="t" anchorCtr="0" compatLnSpc="1">
-            <a:prstTxWarp prst="textNoShape">
-              <a:avLst/>
-            </a:prstTxWarp>
-          </a:bodyPr>
-          <a:lstStyle/>
-          <a:p>
-            <a:endParaRPr lang="en-US"/>
-          </a:p>
-        </p:txBody>
-      </p:sp>
       <p:pic>
         <p:nvPicPr>
           <p:cNvPr id="10" name="Inhaltsplatzhalter 9">
@@ -5355,8 +5767,8 @@
         </p:blipFill>
         <p:spPr bwMode="auto">
           <a:xfrm>
-            <a:off x="3031677" y="2155040"/>
-            <a:ext cx="6128645" cy="3692508"/>
+            <a:off x="2787802" y="1846263"/>
+            <a:ext cx="6676722" cy="4022725"/>
           </a:xfrm>
           <a:prstGeom prst="rect">
             <a:avLst/>
@@ -5373,6 +5785,51 @@
           </a:extLst>
         </p:spPr>
       </p:pic>
+      <p:sp>
+        <p:nvSpPr>
+          <p:cNvPr id="7" name="AutoShape 8" descr="CS400: Git Basic">
+            <a:extLst>
+              <a:ext uri="{FF2B5EF4-FFF2-40B4-BE49-F238E27FC236}">
+                <a16:creationId xmlns:a16="http://schemas.microsoft.com/office/drawing/2014/main" id="{43E4BB96-1EB5-42D8-8A83-F1C8A08925DA}"/>
+              </a:ext>
+            </a:extLst>
+          </p:cNvPr>
+          <p:cNvSpPr>
+            <a:spLocks noChangeAspect="1" noChangeArrowheads="1"/>
+          </p:cNvSpPr>
+          <p:nvPr/>
+        </p:nvSpPr>
+        <p:spPr bwMode="auto">
+          <a:xfrm>
+            <a:off x="5943600" y="3276600"/>
+            <a:ext cx="304800" cy="304800"/>
+          </a:xfrm>
+          <a:prstGeom prst="rect">
+            <a:avLst/>
+          </a:prstGeom>
+          <a:noFill/>
+          <a:extLst>
+            <a:ext uri="{909E8E84-426E-40DD-AFC4-6F175D3DCCD1}">
+              <a14:hiddenFill xmlns:a14="http://schemas.microsoft.com/office/drawing/2010/main">
+                <a:solidFill>
+                  <a:srgbClr val="FFFFFF"/>
+                </a:solidFill>
+              </a14:hiddenFill>
+            </a:ext>
+          </a:extLst>
+        </p:spPr>
+        <p:txBody>
+          <a:bodyPr vert="horz" wrap="square" lIns="91440" tIns="45720" rIns="91440" bIns="45720" numCol="1" anchor="t" anchorCtr="0" compatLnSpc="1">
+            <a:prstTxWarp prst="textNoShape">
+              <a:avLst/>
+            </a:prstTxWarp>
+          </a:bodyPr>
+          <a:lstStyle/>
+          <a:p>
+            <a:endParaRPr lang="en-US"/>
+          </a:p>
+        </p:txBody>
+      </p:sp>
     </p:spTree>
     <p:extLst>
       <p:ext uri="{BB962C8B-B14F-4D97-AF65-F5344CB8AC3E}">
@@ -5913,8 +6370,8 @@
         </p:blipFill>
         <p:spPr>
           <a:xfrm>
-            <a:off x="1849936" y="1825625"/>
-            <a:ext cx="8492127" cy="4351338"/>
+            <a:off x="2200762" y="1846263"/>
+            <a:ext cx="7850802" cy="4022725"/>
           </a:xfrm>
           <a:prstGeom prst="rect">
             <a:avLst/>
@@ -6007,7 +6464,7 @@
         <p:spPr/>
         <p:txBody>
           <a:bodyPr>
-            <a:normAutofit fontScale="92500"/>
+            <a:normAutofit/>
           </a:bodyPr>
           <a:lstStyle/>
           <a:p>
@@ -6024,7 +6481,7 @@
             </a:r>
             <a:r>
               <a:rPr lang="en-US" dirty="0"/>
-              <a:t>			Repository </a:t>
+              <a:t>		Repository </a:t>
             </a:r>
             <a:r>
               <a:rPr lang="en-US" dirty="0" err="1"/>
@@ -6045,7 +6502,7 @@
             </a:r>
             <a:r>
               <a:rPr lang="de-DE" dirty="0"/>
-              <a:t>Erstellt eine lokale Kopie eines bestehenden 					</a:t>
+              <a:t>Erstellt eine lokale Kopie eines bestehenden </a:t>
             </a:r>
             <a:r>
               <a:rPr lang="de-DE" dirty="0" err="1"/>
@@ -6081,7 +6538,7 @@
             </a:pPr>
             <a:r>
               <a:rPr lang="en-US" dirty="0"/>
-              <a:t>git commit		</a:t>
+              <a:t>git commit	</a:t>
             </a:r>
             <a:r>
               <a:rPr lang="en-US" dirty="0" err="1"/>
@@ -6134,7 +6591,7 @@
             </a:pPr>
             <a:r>
               <a:rPr lang="en-US" dirty="0"/>
-              <a:t>git status		</a:t>
+              <a:t>git status	</a:t>
             </a:r>
             <a:r>
               <a:rPr lang="de-DE" dirty="0"/>
@@ -6152,11 +6609,28 @@
             </a:pPr>
             <a:r>
               <a:rPr lang="en-US" dirty="0"/>
-              <a:t>git diff			</a:t>
+              <a:t>git diff		</a:t>
             </a:r>
             <a:r>
               <a:rPr lang="de-DE" dirty="0"/>
               <a:t>Zeigt die Änderungen seit dem letzten Commit</a:t>
+            </a:r>
+          </a:p>
+          <a:p>
+            <a:pPr marL="0" indent="0">
+              <a:buNone/>
+            </a:pPr>
+            <a:r>
+              <a:rPr lang="de-DE" dirty="0" err="1"/>
+              <a:t>git</a:t>
+            </a:r>
+            <a:r>
+              <a:rPr lang="de-DE" dirty="0"/>
+              <a:t> </a:t>
+            </a:r>
+            <a:r>
+              <a:rPr lang="de-DE" dirty="0" err="1"/>
+              <a:t>branch</a:t>
             </a:r>
             <a:endParaRPr lang="en-US" dirty="0"/>
           </a:p>
@@ -8042,12 +8516,7 @@
             <p:ph type="title"/>
           </p:nvPr>
         </p:nvSpPr>
-        <p:spPr>
-          <a:xfrm>
-            <a:off x="838200" y="365125"/>
-            <a:ext cx="10515600" cy="1325563"/>
-          </a:xfrm>
-        </p:spPr>
+        <p:spPr/>
         <p:txBody>
           <a:bodyPr/>
           <a:lstStyle/>
@@ -8079,12 +8548,7 @@
             <p:ph idx="1"/>
           </p:nvPr>
         </p:nvSpPr>
-        <p:spPr>
-          <a:xfrm>
-            <a:off x="838200" y="1825625"/>
-            <a:ext cx="10515600" cy="4351338"/>
-          </a:xfrm>
-        </p:spPr>
+        <p:spPr/>
         <p:txBody>
           <a:bodyPr/>
           <a:lstStyle/>
@@ -8133,15 +8597,13 @@
             </a:r>
             <a:r>
               <a:rPr lang="de-DE" dirty="0"/>
-              <a:t> </a:t>
-            </a:r>
-            <a:r>
-              <a:rPr lang="de-DE" dirty="0" err="1"/>
-              <a:t>hostetErmöglicht</a:t>
-            </a:r>
+              <a:t> hostet</a:t>
+            </a:r>
+          </a:p>
+          <a:p>
             <a:r>
               <a:rPr lang="de-DE" dirty="0"/>
-              <a:t> die Zusammenarbeit und den Austausch von Änderungen</a:t>
+              <a:t>Ermöglicht die Zusammenarbeit und den Austausch von Änderungen</a:t>
             </a:r>
           </a:p>
         </p:txBody>
@@ -8335,6 +8797,37 @@
                                           <p:spTgt spid="3">
                                             <p:txEl>
                                               <p:pRg st="5" end="5"/>
+                                            </p:txEl>
+                                          </p:spTgt>
+                                        </p:tgtEl>
+                                        <p:attrNameLst>
+                                          <p:attrName>style.visibility</p:attrName>
+                                        </p:attrNameLst>
+                                      </p:cBhvr>
+                                      <p:to>
+                                        <p:strVal val="visible"/>
+                                      </p:to>
+                                    </p:set>
+                                  </p:childTnLst>
+                                </p:cTn>
+                              </p:par>
+                              <p:par>
+                                <p:cTn id="17" presetID="1" presetClass="entr" presetSubtype="0" fill="hold" nodeType="withEffect">
+                                  <p:stCondLst>
+                                    <p:cond delay="0"/>
+                                  </p:stCondLst>
+                                  <p:childTnLst>
+                                    <p:set>
+                                      <p:cBhvr>
+                                        <p:cTn id="18" dur="1" fill="hold">
+                                          <p:stCondLst>
+                                            <p:cond delay="0"/>
+                                          </p:stCondLst>
+                                        </p:cTn>
+                                        <p:tgtEl>
+                                          <p:spTgt spid="3">
+                                            <p:txEl>
+                                              <p:pRg st="6" end="6"/>
                                             </p:txEl>
                                           </p:spTgt>
                                         </p:tgtEl>
@@ -10184,15 +10677,10 @@
             <p:ph idx="1"/>
           </p:nvPr>
         </p:nvSpPr>
-        <p:spPr>
-          <a:xfrm>
-            <a:off x="838200" y="1825625"/>
-            <a:ext cx="10515600" cy="4351338"/>
-          </a:xfrm>
-        </p:spPr>
+        <p:spPr/>
         <p:txBody>
           <a:bodyPr>
-            <a:normAutofit lnSpcReduction="10000"/>
+            <a:normAutofit/>
           </a:bodyPr>
           <a:lstStyle/>
           <a:p>
@@ -10911,9 +11399,9 @@
 </file>
 
 <file path=ppt/theme/theme1.xml><?xml version="1.0" encoding="utf-8"?>
-<a:theme xmlns:a="http://schemas.openxmlformats.org/drawingml/2006/main" name="Office">
+<a:theme xmlns:a="http://schemas.openxmlformats.org/drawingml/2006/main" name="Rückblick">
   <a:themeElements>
-    <a:clrScheme name="Office">
+    <a:clrScheme name="Rückblick">
       <a:dk1>
         <a:sysClr val="windowText" lastClr="000000"/>
       </a:dk1>
@@ -10921,44 +11409,44 @@
         <a:sysClr val="window" lastClr="FFFFFF"/>
       </a:lt1>
       <a:dk2>
-        <a:srgbClr val="44546A"/>
+        <a:srgbClr val="455F51"/>
       </a:dk2>
       <a:lt2>
-        <a:srgbClr val="E7E6E6"/>
+        <a:srgbClr val="E2DFCC"/>
       </a:lt2>
       <a:accent1>
-        <a:srgbClr val="4472C4"/>
+        <a:srgbClr val="99CB38"/>
       </a:accent1>
       <a:accent2>
-        <a:srgbClr val="ED7D31"/>
+        <a:srgbClr val="63A537"/>
       </a:accent2>
       <a:accent3>
-        <a:srgbClr val="A5A5A5"/>
+        <a:srgbClr val="37A76F"/>
       </a:accent3>
       <a:accent4>
-        <a:srgbClr val="FFC000"/>
+        <a:srgbClr val="44C1A3"/>
       </a:accent4>
       <a:accent5>
-        <a:srgbClr val="5B9BD5"/>
+        <a:srgbClr val="4EB3CF"/>
       </a:accent5>
       <a:accent6>
-        <a:srgbClr val="70AD47"/>
+        <a:srgbClr val="51C3F9"/>
       </a:accent6>
       <a:hlink>
-        <a:srgbClr val="0563C1"/>
+        <a:srgbClr val="6B9F25"/>
       </a:hlink>
       <a:folHlink>
-        <a:srgbClr val="954F72"/>
+        <a:srgbClr val="B26B02"/>
       </a:folHlink>
     </a:clrScheme>
-    <a:fontScheme name="Office">
+    <a:fontScheme name="Rückblick">
       <a:majorFont>
         <a:latin typeface="Calibri Light" panose="020F0302020204030204"/>
         <a:ea typeface=""/>
         <a:cs typeface=""/>
-        <a:font script="Jpan" typeface="游ゴシック Light"/>
+        <a:font script="Jpan" typeface="ＭＳ Ｐゴシック"/>
         <a:font script="Hang" typeface="맑은 고딕"/>
-        <a:font script="Hans" typeface="等线 Light"/>
+        <a:font script="Hans" typeface="宋体"/>
         <a:font script="Hant" typeface="新細明體"/>
         <a:font script="Arab" typeface="Times New Roman"/>
         <a:font script="Hebr" typeface="Times New Roman"/>
@@ -10986,31 +11474,14 @@
         <a:font script="Viet" typeface="Times New Roman"/>
         <a:font script="Uigh" typeface="Microsoft Uighur"/>
         <a:font script="Geor" typeface="Sylfaen"/>
-        <a:font script="Armn" typeface="Arial"/>
-        <a:font script="Bugi" typeface="Leelawadee UI"/>
-        <a:font script="Bopo" typeface="Microsoft JhengHei"/>
-        <a:font script="Java" typeface="Javanese Text"/>
-        <a:font script="Lisu" typeface="Segoe UI"/>
-        <a:font script="Mymr" typeface="Myanmar Text"/>
-        <a:font script="Nkoo" typeface="Ebrima"/>
-        <a:font script="Olck" typeface="Nirmala UI"/>
-        <a:font script="Osma" typeface="Ebrima"/>
-        <a:font script="Phag" typeface="Phagspa"/>
-        <a:font script="Syrn" typeface="Estrangelo Edessa"/>
-        <a:font script="Syrj" typeface="Estrangelo Edessa"/>
-        <a:font script="Syre" typeface="Estrangelo Edessa"/>
-        <a:font script="Sora" typeface="Nirmala UI"/>
-        <a:font script="Tale" typeface="Microsoft Tai Le"/>
-        <a:font script="Talu" typeface="Microsoft New Tai Lue"/>
-        <a:font script="Tfng" typeface="Ebrima"/>
       </a:majorFont>
       <a:minorFont>
         <a:latin typeface="Calibri" panose="020F0502020204030204"/>
         <a:ea typeface=""/>
         <a:cs typeface=""/>
-        <a:font script="Jpan" typeface="游ゴシック"/>
+        <a:font script="Jpan" typeface="ＭＳ Ｐゴシック"/>
         <a:font script="Hang" typeface="맑은 고딕"/>
-        <a:font script="Hans" typeface="等线"/>
+        <a:font script="Hans" typeface="宋体"/>
         <a:font script="Hant" typeface="新細明體"/>
         <a:font script="Arab" typeface="Arial"/>
         <a:font script="Hebr" typeface="Arial"/>
@@ -11038,26 +11509,9 @@
         <a:font script="Viet" typeface="Arial"/>
         <a:font script="Uigh" typeface="Microsoft Uighur"/>
         <a:font script="Geor" typeface="Sylfaen"/>
-        <a:font script="Armn" typeface="Arial"/>
-        <a:font script="Bugi" typeface="Leelawadee UI"/>
-        <a:font script="Bopo" typeface="Microsoft JhengHei"/>
-        <a:font script="Java" typeface="Javanese Text"/>
-        <a:font script="Lisu" typeface="Segoe UI"/>
-        <a:font script="Mymr" typeface="Myanmar Text"/>
-        <a:font script="Nkoo" typeface="Ebrima"/>
-        <a:font script="Olck" typeface="Nirmala UI"/>
-        <a:font script="Osma" typeface="Ebrima"/>
-        <a:font script="Phag" typeface="Phagspa"/>
-        <a:font script="Syrn" typeface="Estrangelo Edessa"/>
-        <a:font script="Syrj" typeface="Estrangelo Edessa"/>
-        <a:font script="Syre" typeface="Estrangelo Edessa"/>
-        <a:font script="Sora" typeface="Nirmala UI"/>
-        <a:font script="Tale" typeface="Microsoft Tai Le"/>
-        <a:font script="Talu" typeface="Microsoft New Tai Lue"/>
-        <a:font script="Tfng" typeface="Ebrima"/>
       </a:minorFont>
     </a:fontScheme>
-    <a:fmtScheme name="Office">
+    <a:fmtScheme name="Rückblick">
       <a:fillStyleLst>
         <a:solidFill>
           <a:schemeClr val="phClr"/>
@@ -11066,76 +11520,81 @@
           <a:gsLst>
             <a:gs pos="0">
               <a:schemeClr val="phClr">
-                <a:lumMod val="110000"/>
-                <a:satMod val="105000"/>
-                <a:tint val="67000"/>
+                <a:tint val="65000"/>
+                <a:shade val="92000"/>
+                <a:satMod val="130000"/>
               </a:schemeClr>
             </a:gs>
-            <a:gs pos="50000">
+            <a:gs pos="45000">
               <a:schemeClr val="phClr">
-                <a:lumMod val="105000"/>
-                <a:satMod val="103000"/>
-                <a:tint val="73000"/>
+                <a:tint val="60000"/>
+                <a:shade val="99000"/>
+                <a:satMod val="120000"/>
               </a:schemeClr>
             </a:gs>
             <a:gs pos="100000">
               <a:schemeClr val="phClr">
-                <a:lumMod val="105000"/>
-                <a:satMod val="109000"/>
-                <a:tint val="81000"/>
+                <a:tint val="55000"/>
+                <a:satMod val="140000"/>
               </a:schemeClr>
             </a:gs>
           </a:gsLst>
-          <a:lin ang="5400000" scaled="0"/>
+          <a:path path="circle">
+            <a:fillToRect l="100000" t="100000" r="100000" b="100000"/>
+          </a:path>
         </a:gradFill>
         <a:gradFill rotWithShape="1">
           <a:gsLst>
             <a:gs pos="0">
               <a:schemeClr val="phClr">
-                <a:satMod val="103000"/>
-                <a:lumMod val="102000"/>
-                <a:tint val="94000"/>
+                <a:shade val="85000"/>
+                <a:satMod val="130000"/>
               </a:schemeClr>
             </a:gs>
-            <a:gs pos="50000">
+            <a:gs pos="34000">
               <a:schemeClr val="phClr">
-                <a:satMod val="110000"/>
-                <a:lumMod val="100000"/>
-                <a:shade val="100000"/>
+                <a:shade val="87000"/>
+                <a:satMod val="125000"/>
+              </a:schemeClr>
+            </a:gs>
+            <a:gs pos="70000">
+              <a:schemeClr val="phClr">
+                <a:tint val="100000"/>
+                <a:shade val="90000"/>
+                <a:satMod val="130000"/>
               </a:schemeClr>
             </a:gs>
             <a:gs pos="100000">
               <a:schemeClr val="phClr">
-                <a:lumMod val="99000"/>
-                <a:satMod val="120000"/>
-                <a:shade val="78000"/>
+                <a:tint val="100000"/>
+                <a:shade val="100000"/>
+                <a:satMod val="110000"/>
               </a:schemeClr>
             </a:gs>
           </a:gsLst>
-          <a:lin ang="5400000" scaled="0"/>
+          <a:path path="circle">
+            <a:fillToRect l="100000" t="100000" r="100000" b="100000"/>
+          </a:path>
         </a:gradFill>
       </a:fillStyleLst>
       <a:lnStyleLst>
-        <a:ln w="6350" cap="flat" cmpd="sng" algn="ctr">
-          <a:solidFill>
-            <a:schemeClr val="phClr"/>
-          </a:solidFill>
-          <a:prstDash val="solid"/>
-          <a:miter lim="800000"/>
-        </a:ln>
         <a:ln w="12700" cap="flat" cmpd="sng" algn="ctr">
           <a:solidFill>
             <a:schemeClr val="phClr"/>
           </a:solidFill>
           <a:prstDash val="solid"/>
-          <a:miter lim="800000"/>
         </a:ln>
-        <a:ln w="19050" cap="flat" cmpd="sng" algn="ctr">
+        <a:ln w="15875" cap="flat" cmpd="sng" algn="ctr">
           <a:solidFill>
             <a:schemeClr val="phClr"/>
           </a:solidFill>
           <a:prstDash val="solid"/>
-          <a:miter lim="800000"/>
+        </a:ln>
+        <a:ln w="25400" cap="flat" cmpd="sng" algn="ctr">
+          <a:solidFill>
+            <a:schemeClr val="phClr"/>
+          </a:solidFill>
+          <a:prstDash val="solid"/>
         </a:ln>
       </a:lnStyleLst>
       <a:effectStyleLst>
@@ -11143,16 +11602,33 @@
           <a:effectLst/>
         </a:effectStyle>
         <a:effectStyle>
-          <a:effectLst/>
+          <a:effectLst>
+            <a:outerShdw blurRad="38100" dist="25400" dir="2700000" algn="br" rotWithShape="0">
+              <a:srgbClr val="000000">
+                <a:alpha val="60000"/>
+              </a:srgbClr>
+            </a:outerShdw>
+          </a:effectLst>
         </a:effectStyle>
         <a:effectStyle>
           <a:effectLst>
-            <a:outerShdw blurRad="57150" dist="19050" dir="5400000" algn="ctr" rotWithShape="0">
+            <a:outerShdw blurRad="44450" dist="25400" dir="2700000" algn="br" rotWithShape="0">
               <a:srgbClr val="000000">
-                <a:alpha val="63000"/>
+                <a:alpha val="60000"/>
               </a:srgbClr>
             </a:outerShdw>
           </a:effectLst>
+          <a:scene3d>
+            <a:camera prst="orthographicFront">
+              <a:rot lat="0" lon="0" rev="0"/>
+            </a:camera>
+            <a:lightRig rig="threePt" dir="t">
+              <a:rot lat="0" lon="0" rev="19800000"/>
+            </a:lightRig>
+          </a:scene3d>
+          <a:sp3d prstMaterial="flat">
+            <a:bevelT w="25400" h="31750"/>
+          </a:sp3d>
         </a:effectStyle>
       </a:effectStyleLst>
       <a:bgFillStyleLst>
@@ -11161,36 +11637,36 @@
         </a:solidFill>
         <a:solidFill>
           <a:schemeClr val="phClr">
-            <a:tint val="95000"/>
-            <a:satMod val="170000"/>
+            <a:tint val="90000"/>
+            <a:shade val="97000"/>
+            <a:satMod val="130000"/>
           </a:schemeClr>
         </a:solidFill>
         <a:gradFill rotWithShape="1">
           <a:gsLst>
             <a:gs pos="0">
               <a:schemeClr val="phClr">
-                <a:tint val="93000"/>
-                <a:satMod val="150000"/>
-                <a:shade val="98000"/>
-                <a:lumMod val="102000"/>
+                <a:tint val="96000"/>
+                <a:shade val="99000"/>
+                <a:satMod val="140000"/>
               </a:schemeClr>
             </a:gs>
-            <a:gs pos="50000">
+            <a:gs pos="65000">
               <a:schemeClr val="phClr">
-                <a:tint val="98000"/>
+                <a:tint val="100000"/>
+                <a:shade val="80000"/>
                 <a:satMod val="130000"/>
-                <a:shade val="90000"/>
-                <a:lumMod val="103000"/>
               </a:schemeClr>
             </a:gs>
             <a:gs pos="100000">
               <a:schemeClr val="phClr">
-                <a:shade val="63000"/>
+                <a:tint val="100000"/>
+                <a:shade val="48000"/>
                 <a:satMod val="120000"/>
               </a:schemeClr>
             </a:gs>
           </a:gsLst>
-          <a:lin ang="5400000" scaled="0"/>
+          <a:lin ang="16200000" scaled="0"/>
         </a:gradFill>
       </a:bgFillStyleLst>
     </a:fmtScheme>
@@ -11199,7 +11675,7 @@
   <a:extraClrSchemeLst/>
   <a:extLst>
     <a:ext uri="{05A4C25C-085E-4340-85A3-A5531E510DB2}">
-      <thm15:themeFamily xmlns:thm15="http://schemas.microsoft.com/office/thememl/2012/main" name="Office Theme" id="{62F939B6-93AF-4DB8-9C6B-D6C7DFDC589F}" vid="{4A3C46E8-61CC-4603-A589-7422A47A8E4A}"/>
+      <thm15:themeFamily xmlns:thm15="http://schemas.microsoft.com/office/thememl/2012/main" name="Retrospect" id="{5F128B03-DCCA-4EEB-AB3B-CF2899314A46}" vid="{D26EA377-59BD-4C9C-9D94-EE8416EE4C79}"/>
     </a:ext>
   </a:extLst>
 </a:theme>

--- a/Einführung in Git und Github.pptx
+++ b/Einführung in Git und Github.pptx
@@ -6464,7 +6464,7 @@
         <p:spPr/>
         <p:txBody>
           <a:bodyPr>
-            <a:normAutofit/>
+            <a:normAutofit fontScale="92500" lnSpcReduction="10000"/>
           </a:bodyPr>
           <a:lstStyle/>
           <a:p>
@@ -6591,7 +6591,7 @@
             </a:pPr>
             <a:r>
               <a:rPr lang="en-US" dirty="0"/>
-              <a:t>git status	</a:t>
+              <a:t>git status		</a:t>
             </a:r>
             <a:r>
               <a:rPr lang="de-DE" dirty="0"/>
@@ -6631,6 +6631,31 @@
             <a:r>
               <a:rPr lang="de-DE" dirty="0" err="1"/>
               <a:t>branch</a:t>
+            </a:r>
+            <a:r>
+              <a:rPr lang="de-DE" dirty="0"/>
+              <a:t>	Erstellt einen neuen Branch / zeigt </a:t>
+            </a:r>
+            <a:r>
+              <a:rPr lang="de-DE" dirty="0" err="1"/>
+              <a:t>Branches</a:t>
+            </a:r>
+            <a:r>
+              <a:rPr lang="de-DE" dirty="0"/>
+              <a:t> an</a:t>
+            </a:r>
+          </a:p>
+          <a:p>
+            <a:pPr marL="0" indent="0">
+              <a:buNone/>
+            </a:pPr>
+            <a:r>
+              <a:rPr lang="en-US" dirty="0"/>
+              <a:t>git switch	</a:t>
+            </a:r>
+            <a:r>
+              <a:rPr lang="de-DE" dirty="0"/>
+              <a:t>Wechselt zu einem anderen Branch</a:t>
             </a:r>
             <a:endParaRPr lang="en-US" dirty="0"/>
           </a:p>

--- a/Einführung in Git und Github.pptx
+++ b/Einführung in Git und Github.pptx
@@ -7202,6 +7202,12 @@
             <a:pPr marL="0" indent="0">
               <a:buNone/>
             </a:pPr>
+            <a:endParaRPr lang="en-US" dirty="0"/>
+          </a:p>
+          <a:p>
+            <a:pPr marL="0" indent="0">
+              <a:buNone/>
+            </a:pPr>
             <a:r>
               <a:rPr lang="en-US" dirty="0"/>
               <a:t>Mac/Linux: Terminal </a:t>
@@ -7236,7 +7242,7 @@
         </p:blipFill>
         <p:spPr>
           <a:xfrm>
-            <a:off x="1283714" y="2388181"/>
+            <a:off x="1283714" y="2332426"/>
             <a:ext cx="9245013" cy="2462600"/>
           </a:xfrm>
           <a:prstGeom prst="rect">
